--- a/经销商培训_分享会完整版.pptx
+++ b/经销商培训_分享会完整版.pptx
@@ -21,6 +21,9 @@
     <p:sldId id="531" r:id="rId19"/>
     <p:sldId id="532" r:id="rId20"/>
     <p:sldId id="533" r:id="rId21"/>
+    <p:sldId id="534" r:id="rId22"/>
+    <p:sldId id="535" r:id="rId23"/>
+    <p:sldId id="536" r:id="rId24"/>
   </p:sldIdLst>
   <p:sldSz cx="12192000" cy="6858000"/>
   <p:notesSz cx="6858000" cy="9144000"/>
@@ -3641,7 +3644,7 @@
                 </a:solidFill>
                 <a:latin typeface="微软雅黑"/>
               </a:rPr>
-              <a:t>数据说话 · 结构升级 · 把燃热配套率做起来</a:t>
+              <a:t>数据说话 · 门店标杆 · 把燃热配套率做起来</a:t>
             </a:r>
           </a:p>
         </p:txBody>
@@ -3791,7 +3794,7 @@
                 </a:solidFill>
                 <a:latin typeface="微软雅黑"/>
               </a:rPr>
-              <a:t>四、18L强在哪：三句话讲透</a:t>
+              <a:t>四、个人标杆：18L照样能卖</a:t>
             </a:r>
           </a:p>
         </p:txBody>
@@ -3804,8 +3807,8 @@
         </p:nvSpPr>
         <p:spPr>
           <a:xfrm>
-            <a:off x="9235440" y="201168"/>
-            <a:ext cx="2560320" cy="457200"/>
+            <a:off x="9144000" y="201168"/>
+            <a:ext cx="2651760" cy="457200"/>
           </a:xfrm>
           <a:prstGeom prst="rect">
             <a:avLst/>
@@ -3826,7 +3829,7 @@
                 </a:solidFill>
                 <a:latin typeface="微软雅黑"/>
               </a:rPr>
-              <a:t>产品力</a:t>
+              <a:t>9/3-9/15 累计</a:t>
             </a:r>
           </a:p>
         </p:txBody>
@@ -3840,8 +3843,8 @@
           <p:nvPr/>
         </p:nvGraphicFramePr>
         <p:xfrm>
-          <a:off x="548640" y="1280160"/>
-          <a:ext cx="11064240" cy="4114800"/>
+          <a:off x="548640" y="1234440"/>
+          <a:ext cx="11064237" cy="4224528"/>
         </p:xfrm>
         <a:graphic>
           <a:graphicData uri="http://schemas.openxmlformats.org/drawingml/2006/table">
@@ -3850,10 +3853,12 @@
                 <a:tableStyleId>{5C22544A-7EE6-4342-B048-85BDC9FD1C3A}</a:tableStyleId>
               </a:tblPr>
               <a:tblGrid>
-                <a:gridCol w="2212848"/>
-                <a:gridCol w="8851392"/>
+                <a:gridCol w="2655417"/>
+                <a:gridCol w="1327708"/>
+                <a:gridCol w="1327708"/>
+                <a:gridCol w="5753404"/>
               </a:tblGrid>
-              <a:tr h="822960">
+              <a:tr h="603504">
                 <a:tc>
                   <a:txBody>
                     <a:bodyPr/>
@@ -3867,7 +3872,7 @@
                           </a:solidFill>
                           <a:latin typeface="微软雅黑"/>
                         </a:rPr>
-                        <a:t>核心点</a:t>
+                        <a:t>姓名</a:t>
                       </a:r>
                     </a:p>
                   </a:txBody>
@@ -3890,7 +3895,7 @@
                           </a:solidFill>
                           <a:latin typeface="微软雅黑"/>
                         </a:rPr>
-                        <a:t>讲给客户的话</a:t>
+                        <a:t>18L</a:t>
                       </a:r>
                     </a:p>
                   </a:txBody>
@@ -3900,8 +3905,54 @@
                     </a:solidFill>
                   </a:tcPr>
                 </a:tc>
+                <a:tc>
+                  <a:txBody>
+                    <a:bodyPr/>
+                    <a:lstStyle/>
+                    <a:p>
+                      <a:pPr algn="ctr"/>
+                      <a:r>
+                        <a:rPr sz="1400" b="1">
+                          <a:solidFill>
+                            <a:srgbClr val="FFFFFF"/>
+                          </a:solidFill>
+                          <a:latin typeface="微软雅黑"/>
+                        </a:rPr>
+                        <a:t>燃热</a:t>
+                      </a:r>
+                    </a:p>
+                  </a:txBody>
+                  <a:tcPr marL="54864" marR="54864" marT="18288" marB="18288" anchor="ctr">
+                    <a:solidFill>
+                      <a:srgbClr val="B91C1C"/>
+                    </a:solidFill>
+                  </a:tcPr>
+                </a:tc>
+                <a:tc>
+                  <a:txBody>
+                    <a:bodyPr/>
+                    <a:lstStyle/>
+                    <a:p>
+                      <a:pPr algn="ctr"/>
+                      <a:r>
+                        <a:rPr sz="1400" b="1">
+                          <a:solidFill>
+                            <a:srgbClr val="FFFFFF"/>
+                          </a:solidFill>
+                          <a:latin typeface="微软雅黑"/>
+                        </a:rPr>
+                        <a:t>说明</a:t>
+                      </a:r>
+                    </a:p>
+                  </a:txBody>
+                  <a:tcPr marL="54864" marR="54864" marT="18288" marB="18288" anchor="ctr">
+                    <a:solidFill>
+                      <a:srgbClr val="B91C1C"/>
+                    </a:solidFill>
+                  </a:tcPr>
+                </a:tc>
               </a:tr>
-              <a:tr h="822960">
+              <a:tr h="603504">
                 <a:tc>
                   <a:txBody>
                     <a:bodyPr/>
@@ -3909,13 +3960,13 @@
                     <a:p>
                       <a:pPr algn="l"/>
                       <a:r>
-                        <a:rPr sz="1500" b="1">
-                          <a:solidFill>
-                            <a:srgbClr val="1E293B"/>
-                          </a:solidFill>
-                          <a:latin typeface="微软雅黑"/>
-                        </a:rPr>
-                        <a:t>真18升</a:t>
+                        <a:rPr sz="1400" b="1">
+                          <a:solidFill>
+                            <a:srgbClr val="1E293B"/>
+                          </a:solidFill>
+                          <a:latin typeface="微软雅黑"/>
+                        </a:rPr>
+                        <a:t>司马晓坤</a:t>
                       </a:r>
                     </a:p>
                   </a:txBody>
@@ -3932,13 +3983,13 @@
                     <a:p>
                       <a:pPr algn="ctr"/>
                       <a:r>
-                        <a:rPr sz="1500" b="0">
-                          <a:solidFill>
-                            <a:srgbClr val="1E293B"/>
-                          </a:solidFill>
-                          <a:latin typeface="微软雅黑"/>
-                        </a:rPr>
-                        <a:t>换热器四分管升级为五分管，火排面积、喷嘴直径、热负荷同步升级——机器本身就长成18升</a:t>
+                        <a:rPr sz="1400" b="0">
+                          <a:solidFill>
+                            <a:srgbClr val="1E293B"/>
+                          </a:solidFill>
+                          <a:latin typeface="微软雅黑"/>
+                        </a:rPr>
+                        <a:t>3</a:t>
                       </a:r>
                     </a:p>
                   </a:txBody>
@@ -3948,8 +3999,54 @@
                     </a:solidFill>
                   </a:tcPr>
                 </a:tc>
+                <a:tc>
+                  <a:txBody>
+                    <a:bodyPr/>
+                    <a:lstStyle/>
+                    <a:p>
+                      <a:pPr algn="ctr"/>
+                      <a:r>
+                        <a:rPr sz="1400" b="0">
+                          <a:solidFill>
+                            <a:srgbClr val="1E293B"/>
+                          </a:solidFill>
+                          <a:latin typeface="微软雅黑"/>
+                        </a:rPr>
+                        <a:t>3</a:t>
+                      </a:r>
+                    </a:p>
+                  </a:txBody>
+                  <a:tcPr marL="54864" marR="54864" marT="18288" marB="18288" anchor="ctr">
+                    <a:solidFill>
+                      <a:srgbClr val="FFFFFF"/>
+                    </a:solidFill>
+                  </a:tcPr>
+                </a:tc>
+                <a:tc>
+                  <a:txBody>
+                    <a:bodyPr/>
+                    <a:lstStyle/>
+                    <a:p>
+                      <a:pPr algn="ctr"/>
+                      <a:r>
+                        <a:rPr sz="1400" b="0">
+                          <a:solidFill>
+                            <a:srgbClr val="1E293B"/>
+                          </a:solidFill>
+                          <a:latin typeface="微软雅黑"/>
+                        </a:rPr>
+                        <a:t>18L占个人燃热100%</a:t>
+                      </a:r>
+                    </a:p>
+                  </a:txBody>
+                  <a:tcPr marL="54864" marR="54864" marT="18288" marB="18288" anchor="ctr">
+                    <a:solidFill>
+                      <a:srgbClr val="FFFFFF"/>
+                    </a:solidFill>
+                  </a:tcPr>
+                </a:tc>
               </a:tr>
-              <a:tr h="822960">
+              <a:tr h="603504">
                 <a:tc>
                   <a:txBody>
                     <a:bodyPr/>
@@ -3957,13 +4054,13 @@
                     <a:p>
                       <a:pPr algn="l"/>
                       <a:r>
-                        <a:rPr sz="1500" b="1">
-                          <a:solidFill>
-                            <a:srgbClr val="1E293B"/>
-                          </a:solidFill>
-                          <a:latin typeface="微软雅黑"/>
-                        </a:rPr>
-                        <a:t>免改表</a:t>
+                        <a:rPr sz="1400" b="1">
+                          <a:solidFill>
+                            <a:srgbClr val="1E293B"/>
+                          </a:solidFill>
+                          <a:latin typeface="微软雅黑"/>
+                        </a:rPr>
+                        <a:t>张琼纯</a:t>
                       </a:r>
                     </a:p>
                   </a:txBody>
@@ -3980,13 +4077,13 @@
                     <a:p>
                       <a:pPr algn="ctr"/>
                       <a:r>
-                        <a:rPr sz="1500" b="0">
-                          <a:solidFill>
-                            <a:srgbClr val="1E293B"/>
-                          </a:solidFill>
-                          <a:latin typeface="微软雅黑"/>
-                        </a:rPr>
-                        <a:t>用现有G2.5气表直接装，不改表不改管路不报批，省两三千；20升要换G4表还得改管</a:t>
+                        <a:rPr sz="1400" b="0">
+                          <a:solidFill>
+                            <a:srgbClr val="1E293B"/>
+                          </a:solidFill>
+                          <a:latin typeface="微软雅黑"/>
+                        </a:rPr>
+                        <a:t>2</a:t>
                       </a:r>
                     </a:p>
                   </a:txBody>
@@ -3996,8 +4093,54 @@
                     </a:solidFill>
                   </a:tcPr>
                 </a:tc>
+                <a:tc>
+                  <a:txBody>
+                    <a:bodyPr/>
+                    <a:lstStyle/>
+                    <a:p>
+                      <a:pPr algn="ctr"/>
+                      <a:r>
+                        <a:rPr sz="1400" b="0">
+                          <a:solidFill>
+                            <a:srgbClr val="1E293B"/>
+                          </a:solidFill>
+                          <a:latin typeface="微软雅黑"/>
+                        </a:rPr>
+                        <a:t>6</a:t>
+                      </a:r>
+                    </a:p>
+                  </a:txBody>
+                  <a:tcPr marL="54864" marR="54864" marT="18288" marB="18288" anchor="ctr">
+                    <a:solidFill>
+                      <a:srgbClr val="F1F5F9"/>
+                    </a:solidFill>
+                  </a:tcPr>
+                </a:tc>
+                <a:tc>
+                  <a:txBody>
+                    <a:bodyPr/>
+                    <a:lstStyle/>
+                    <a:p>
+                      <a:pPr algn="ctr"/>
+                      <a:r>
+                        <a:rPr sz="1400" b="0">
+                          <a:solidFill>
+                            <a:srgbClr val="1E293B"/>
+                          </a:solidFill>
+                          <a:latin typeface="微软雅黑"/>
+                        </a:rPr>
+                        <a:t>燃热全城第一（6台）</a:t>
+                      </a:r>
+                    </a:p>
+                  </a:txBody>
+                  <a:tcPr marL="54864" marR="54864" marT="18288" marB="18288" anchor="ctr">
+                    <a:solidFill>
+                      <a:srgbClr val="F1F5F9"/>
+                    </a:solidFill>
+                  </a:tcPr>
+                </a:tc>
               </a:tr>
-              <a:tr h="822960">
+              <a:tr h="603504">
                 <a:tc>
                   <a:txBody>
                     <a:bodyPr/>
@@ -4005,13 +4148,13 @@
                     <a:p>
                       <a:pPr algn="l"/>
                       <a:r>
-                        <a:rPr sz="1500" b="1">
-                          <a:solidFill>
-                            <a:srgbClr val="1E293B"/>
-                          </a:solidFill>
-                          <a:latin typeface="微软雅黑"/>
-                        </a:rPr>
-                        <a:t>恒温稳</a:t>
+                        <a:rPr sz="1400" b="1">
+                          <a:solidFill>
+                            <a:srgbClr val="1E293B"/>
+                          </a:solidFill>
+                          <a:latin typeface="微软雅黑"/>
+                        </a:rPr>
+                        <a:t>黄炳茂</a:t>
                       </a:r>
                     </a:p>
                   </a:txBody>
@@ -4028,13 +4171,13 @@
                     <a:p>
                       <a:pPr algn="ctr"/>
                       <a:r>
-                        <a:rPr sz="1500" b="0">
-                          <a:solidFill>
-                            <a:srgbClr val="1E293B"/>
-                          </a:solidFill>
-                          <a:latin typeface="微软雅黑"/>
-                        </a:rPr>
-                        <a:t>±0.1℃精准控温，双卫加厨房同时用水，水温水量双稳，不忽冷忽热</a:t>
+                        <a:rPr sz="1400" b="0">
+                          <a:solidFill>
+                            <a:srgbClr val="1E293B"/>
+                          </a:solidFill>
+                          <a:latin typeface="微软雅黑"/>
+                        </a:rPr>
+                        <a:t>2</a:t>
                       </a:r>
                     </a:p>
                   </a:txBody>
@@ -4044,8 +4187,54 @@
                     </a:solidFill>
                   </a:tcPr>
                 </a:tc>
+                <a:tc>
+                  <a:txBody>
+                    <a:bodyPr/>
+                    <a:lstStyle/>
+                    <a:p>
+                      <a:pPr algn="ctr"/>
+                      <a:r>
+                        <a:rPr sz="1400" b="0">
+                          <a:solidFill>
+                            <a:srgbClr val="1E293B"/>
+                          </a:solidFill>
+                          <a:latin typeface="微软雅黑"/>
+                        </a:rPr>
+                        <a:t>4</a:t>
+                      </a:r>
+                    </a:p>
+                  </a:txBody>
+                  <a:tcPr marL="54864" marR="54864" marT="18288" marB="18288" anchor="ctr">
+                    <a:solidFill>
+                      <a:srgbClr val="FFFFFF"/>
+                    </a:solidFill>
+                  </a:tcPr>
+                </a:tc>
+                <a:tc>
+                  <a:txBody>
+                    <a:bodyPr/>
+                    <a:lstStyle/>
+                    <a:p>
+                      <a:pPr algn="ctr"/>
+                      <a:r>
+                        <a:rPr sz="1400" b="0">
+                          <a:solidFill>
+                            <a:srgbClr val="1E293B"/>
+                          </a:solidFill>
+                          <a:latin typeface="微软雅黑"/>
+                        </a:rPr>
+                        <a:t>老客连带＋硬对比破进口执念</a:t>
+                      </a:r>
+                    </a:p>
+                  </a:txBody>
+                  <a:tcPr marL="54864" marR="54864" marT="18288" marB="18288" anchor="ctr">
+                    <a:solidFill>
+                      <a:srgbClr val="FFFFFF"/>
+                    </a:solidFill>
+                  </a:tcPr>
+                </a:tc>
               </a:tr>
-              <a:tr h="822960">
+              <a:tr h="603504">
                 <a:tc>
                   <a:txBody>
                     <a:bodyPr/>
@@ -4053,13 +4242,13 @@
                     <a:p>
                       <a:pPr algn="l"/>
                       <a:r>
-                        <a:rPr sz="1500" b="1">
-                          <a:solidFill>
-                            <a:srgbClr val="1E293B"/>
-                          </a:solidFill>
-                          <a:latin typeface="微软雅黑"/>
-                        </a:rPr>
-                        <a:t>多点同开</a:t>
+                        <a:rPr sz="1400" b="1">
+                          <a:solidFill>
+                            <a:srgbClr val="1E293B"/>
+                          </a:solidFill>
+                          <a:latin typeface="微软雅黑"/>
+                        </a:rPr>
+                        <a:t>梁红生</a:t>
                       </a:r>
                     </a:p>
                   </a:txBody>
@@ -4076,13 +4265,247 @@
                     <a:p>
                       <a:pPr algn="ctr"/>
                       <a:r>
-                        <a:rPr sz="1500" b="0">
-                          <a:solidFill>
-                            <a:srgbClr val="1E293B"/>
-                          </a:solidFill>
-                          <a:latin typeface="微软雅黑"/>
-                        </a:rPr>
-                        <a:t>双卫同洗不排队、不掉温，这是16升给不了的体验</a:t>
+                        <a:rPr sz="1400" b="0">
+                          <a:solidFill>
+                            <a:srgbClr val="1E293B"/>
+                          </a:solidFill>
+                          <a:latin typeface="微软雅黑"/>
+                        </a:rPr>
+                        <a:t>2</a:t>
+                      </a:r>
+                    </a:p>
+                  </a:txBody>
+                  <a:tcPr marL="54864" marR="54864" marT="18288" marB="18288" anchor="ctr">
+                    <a:solidFill>
+                      <a:srgbClr val="F1F5F9"/>
+                    </a:solidFill>
+                  </a:tcPr>
+                </a:tc>
+                <a:tc>
+                  <a:txBody>
+                    <a:bodyPr/>
+                    <a:lstStyle/>
+                    <a:p>
+                      <a:pPr algn="ctr"/>
+                      <a:r>
+                        <a:rPr sz="1400" b="0">
+                          <a:solidFill>
+                            <a:srgbClr val="1E293B"/>
+                          </a:solidFill>
+                          <a:latin typeface="微软雅黑"/>
+                        </a:rPr>
+                        <a:t>4</a:t>
+                      </a:r>
+                    </a:p>
+                  </a:txBody>
+                  <a:tcPr marL="54864" marR="54864" marT="18288" marB="18288" anchor="ctr">
+                    <a:solidFill>
+                      <a:srgbClr val="F1F5F9"/>
+                    </a:solidFill>
+                  </a:tcPr>
+                </a:tc>
+                <a:tc>
+                  <a:txBody>
+                    <a:bodyPr/>
+                    <a:lstStyle/>
+                    <a:p>
+                      <a:pPr algn="ctr"/>
+                      <a:r>
+                        <a:rPr sz="1400" b="0">
+                          <a:solidFill>
+                            <a:srgbClr val="1E293B"/>
+                          </a:solidFill>
+                          <a:latin typeface="微软雅黑"/>
+                        </a:rPr>
+                        <a:t>双卫场景＋免改表</a:t>
+                      </a:r>
+                    </a:p>
+                  </a:txBody>
+                  <a:tcPr marL="54864" marR="54864" marT="18288" marB="18288" anchor="ctr">
+                    <a:solidFill>
+                      <a:srgbClr val="F1F5F9"/>
+                    </a:solidFill>
+                  </a:tcPr>
+                </a:tc>
+              </a:tr>
+              <a:tr h="603504">
+                <a:tc>
+                  <a:txBody>
+                    <a:bodyPr/>
+                    <a:lstStyle/>
+                    <a:p>
+                      <a:pPr algn="l"/>
+                      <a:r>
+                        <a:rPr sz="1400" b="1">
+                          <a:solidFill>
+                            <a:srgbClr val="1E293B"/>
+                          </a:solidFill>
+                          <a:latin typeface="微软雅黑"/>
+                        </a:rPr>
+                        <a:t>郑美兰</a:t>
+                      </a:r>
+                    </a:p>
+                  </a:txBody>
+                  <a:tcPr marL="54864" marR="54864" marT="18288" marB="18288" anchor="ctr">
+                    <a:solidFill>
+                      <a:srgbClr val="FFFFFF"/>
+                    </a:solidFill>
+                  </a:tcPr>
+                </a:tc>
+                <a:tc>
+                  <a:txBody>
+                    <a:bodyPr/>
+                    <a:lstStyle/>
+                    <a:p>
+                      <a:pPr algn="ctr"/>
+                      <a:r>
+                        <a:rPr sz="1400" b="0">
+                          <a:solidFill>
+                            <a:srgbClr val="1E293B"/>
+                          </a:solidFill>
+                          <a:latin typeface="微软雅黑"/>
+                        </a:rPr>
+                        <a:t>2</a:t>
+                      </a:r>
+                    </a:p>
+                  </a:txBody>
+                  <a:tcPr marL="54864" marR="54864" marT="18288" marB="18288" anchor="ctr">
+                    <a:solidFill>
+                      <a:srgbClr val="FFFFFF"/>
+                    </a:solidFill>
+                  </a:tcPr>
+                </a:tc>
+                <a:tc>
+                  <a:txBody>
+                    <a:bodyPr/>
+                    <a:lstStyle/>
+                    <a:p>
+                      <a:pPr algn="ctr"/>
+                      <a:r>
+                        <a:rPr sz="1400" b="0">
+                          <a:solidFill>
+                            <a:srgbClr val="1E293B"/>
+                          </a:solidFill>
+                          <a:latin typeface="微软雅黑"/>
+                        </a:rPr>
+                        <a:t>4</a:t>
+                      </a:r>
+                    </a:p>
+                  </a:txBody>
+                  <a:tcPr marL="54864" marR="54864" marT="18288" marB="18288" anchor="ctr">
+                    <a:solidFill>
+                      <a:srgbClr val="FFFFFF"/>
+                    </a:solidFill>
+                  </a:tcPr>
+                </a:tc>
+                <a:tc>
+                  <a:txBody>
+                    <a:bodyPr/>
+                    <a:lstStyle/>
+                    <a:p>
+                      <a:pPr algn="ctr"/>
+                      <a:r>
+                        <a:rPr sz="1400" b="0">
+                          <a:solidFill>
+                            <a:srgbClr val="1E293B"/>
+                          </a:solidFill>
+                          <a:latin typeface="微软雅黑"/>
+                        </a:rPr>
+                        <a:t>稳定输出</a:t>
+                      </a:r>
+                    </a:p>
+                  </a:txBody>
+                  <a:tcPr marL="54864" marR="54864" marT="18288" marB="18288" anchor="ctr">
+                    <a:solidFill>
+                      <a:srgbClr val="FFFFFF"/>
+                    </a:solidFill>
+                  </a:tcPr>
+                </a:tc>
+              </a:tr>
+              <a:tr h="603504">
+                <a:tc>
+                  <a:txBody>
+                    <a:bodyPr/>
+                    <a:lstStyle/>
+                    <a:p>
+                      <a:pPr algn="l"/>
+                      <a:r>
+                        <a:rPr sz="1400" b="1">
+                          <a:solidFill>
+                            <a:srgbClr val="1E293B"/>
+                          </a:solidFill>
+                          <a:latin typeface="微软雅黑"/>
+                        </a:rPr>
+                        <a:t>鄢金葵</a:t>
+                      </a:r>
+                    </a:p>
+                  </a:txBody>
+                  <a:tcPr marL="54864" marR="54864" marT="18288" marB="18288" anchor="ctr">
+                    <a:solidFill>
+                      <a:srgbClr val="F1F5F9"/>
+                    </a:solidFill>
+                  </a:tcPr>
+                </a:tc>
+                <a:tc>
+                  <a:txBody>
+                    <a:bodyPr/>
+                    <a:lstStyle/>
+                    <a:p>
+                      <a:pPr algn="ctr"/>
+                      <a:r>
+                        <a:rPr sz="1400" b="0">
+                          <a:solidFill>
+                            <a:srgbClr val="1E293B"/>
+                          </a:solidFill>
+                          <a:latin typeface="微软雅黑"/>
+                        </a:rPr>
+                        <a:t>2</a:t>
+                      </a:r>
+                    </a:p>
+                  </a:txBody>
+                  <a:tcPr marL="54864" marR="54864" marT="18288" marB="18288" anchor="ctr">
+                    <a:solidFill>
+                      <a:srgbClr val="F1F5F9"/>
+                    </a:solidFill>
+                  </a:tcPr>
+                </a:tc>
+                <a:tc>
+                  <a:txBody>
+                    <a:bodyPr/>
+                    <a:lstStyle/>
+                    <a:p>
+                      <a:pPr algn="ctr"/>
+                      <a:r>
+                        <a:rPr sz="1400" b="0">
+                          <a:solidFill>
+                            <a:srgbClr val="1E293B"/>
+                          </a:solidFill>
+                          <a:latin typeface="微软雅黑"/>
+                        </a:rPr>
+                        <a:t>3</a:t>
+                      </a:r>
+                    </a:p>
+                  </a:txBody>
+                  <a:tcPr marL="54864" marR="54864" marT="18288" marB="18288" anchor="ctr">
+                    <a:solidFill>
+                      <a:srgbClr val="F1F5F9"/>
+                    </a:solidFill>
+                  </a:tcPr>
+                </a:tc>
+                <a:tc>
+                  <a:txBody>
+                    <a:bodyPr/>
+                    <a:lstStyle/>
+                    <a:p>
+                      <a:pPr algn="ctr"/>
+                      <a:r>
+                        <a:rPr sz="1400" b="0">
+                          <a:solidFill>
+                            <a:srgbClr val="1E293B"/>
+                          </a:solidFill>
+                          <a:latin typeface="微软雅黑"/>
+                        </a:rPr>
+                        <a:t>—</a:t>
                       </a:r>
                     </a:p>
                   </a:txBody>
@@ -4105,8 +4528,8 @@
         </p:nvSpPr>
         <p:spPr>
           <a:xfrm>
-            <a:off x="548640" y="5394960"/>
-            <a:ext cx="11064240" cy="914400"/>
+            <a:off x="548640" y="5120640"/>
+            <a:ext cx="11064240" cy="1097280"/>
           </a:xfrm>
           <a:prstGeom prst="rect">
             <a:avLst/>
@@ -4125,13 +4548,13 @@
               </a:lnSpc>
             </a:pPr>
             <a:r>
-              <a:rPr sz="1700" b="1">
+              <a:rPr sz="1500" b="0">
                 <a:solidFill>
-                  <a:srgbClr val="B91C1C"/>
+                  <a:srgbClr val="64748B"/>
                 </a:solidFill>
                 <a:latin typeface="微软雅黑"/>
               </a:rPr>
-              <a:t>一句话：同样三四千的价位，竞品给的是14升、16升，我们给的是真18升。</a:t>
+              <a:t>个人18L最高3台、燃热最高6台——都是同一条街上、同一个品牌的导购做出来的。</a:t>
             </a:r>
           </a:p>
         </p:txBody>
@@ -4227,7 +4650,7 @@
                 </a:solidFill>
                 <a:latin typeface="微软雅黑"/>
               </a:rPr>
-              <a:t>五、竞品会怎么拦，我们怎么接</a:t>
+              <a:t>五、三个真实案例：客户就这么被说服的</a:t>
             </a:r>
           </a:p>
         </p:txBody>
@@ -4240,8 +4663,8 @@
         </p:nvSpPr>
         <p:spPr>
           <a:xfrm>
-            <a:off x="9235440" y="201168"/>
-            <a:ext cx="2560320" cy="457200"/>
+            <a:off x="9144000" y="201168"/>
+            <a:ext cx="2651760" cy="457200"/>
           </a:xfrm>
           <a:prstGeom prst="rect">
             <a:avLst/>
@@ -4262,239 +4685,21 @@
                 </a:solidFill>
                 <a:latin typeface="微软雅黑"/>
               </a:rPr>
-              <a:t>三种常见打法</a:t>
+              <a:t>导购实战案例库</a:t>
             </a:r>
           </a:p>
         </p:txBody>
       </p:sp>
-      <p:graphicFrame>
-        <p:nvGraphicFramePr>
-          <p:cNvPr id="5" name="Table 4"/>
-          <p:cNvGraphicFramePr>
-            <a:graphicFrameLocks noGrp="1"/>
-          </p:cNvGraphicFramePr>
-          <p:nvPr/>
-        </p:nvGraphicFramePr>
-        <p:xfrm>
-          <a:off x="548640" y="1280160"/>
-          <a:ext cx="11064239" cy="4389120"/>
-        </p:xfrm>
-        <a:graphic>
-          <a:graphicData uri="http://schemas.openxmlformats.org/drawingml/2006/table">
-            <a:tbl>
-              <a:tblPr firstRow="1" bandRow="1">
-                <a:tableStyleId>{5C22544A-7EE6-4342-B048-85BDC9FD1C3A}</a:tableStyleId>
-              </a:tblPr>
-              <a:tblGrid>
-                <a:gridCol w="3319272"/>
-                <a:gridCol w="7744967"/>
-              </a:tblGrid>
-              <a:tr h="1097280">
-                <a:tc>
-                  <a:txBody>
-                    <a:bodyPr/>
-                    <a:lstStyle/>
-                    <a:p>
-                      <a:pPr algn="l"/>
-                      <a:r>
-                        <a:rPr sz="1400" b="1">
-                          <a:solidFill>
-                            <a:srgbClr val="FFFFFF"/>
-                          </a:solidFill>
-                          <a:latin typeface="微软雅黑"/>
-                        </a:rPr>
-                        <a:t>竞品打法</a:t>
-                      </a:r>
-                    </a:p>
-                  </a:txBody>
-                  <a:tcPr marL="54864" marR="54864" marT="18288" marB="18288" anchor="ctr">
-                    <a:solidFill>
-                      <a:srgbClr val="B91C1C"/>
-                    </a:solidFill>
-                  </a:tcPr>
-                </a:tc>
-                <a:tc>
-                  <a:txBody>
-                    <a:bodyPr/>
-                    <a:lstStyle/>
-                    <a:p>
-                      <a:pPr algn="ctr"/>
-                      <a:r>
-                        <a:rPr sz="1400" b="1">
-                          <a:solidFill>
-                            <a:srgbClr val="FFFFFF"/>
-                          </a:solidFill>
-                          <a:latin typeface="微软雅黑"/>
-                        </a:rPr>
-                        <a:t>我们的接法</a:t>
-                      </a:r>
-                    </a:p>
-                  </a:txBody>
-                  <a:tcPr marL="54864" marR="54864" marT="18288" marB="18288" anchor="ctr">
-                    <a:solidFill>
-                      <a:srgbClr val="B91C1C"/>
-                    </a:solidFill>
-                  </a:tcPr>
-                </a:tc>
-              </a:tr>
-              <a:tr h="1097280">
-                <a:tc>
-                  <a:txBody>
-                    <a:bodyPr/>
-                    <a:lstStyle/>
-                    <a:p>
-                      <a:pPr algn="l"/>
-                      <a:r>
-                        <a:rPr sz="1500" b="1">
-                          <a:solidFill>
-                            <a:srgbClr val="1E293B"/>
-                          </a:solidFill>
-                          <a:latin typeface="微软雅黑"/>
-                        </a:rPr>
-                        <a:t>16升够用了</a:t>
-                      </a:r>
-                    </a:p>
-                  </a:txBody>
-                  <a:tcPr marL="54864" marR="54864" marT="18288" marB="18288" anchor="ctr">
-                    <a:solidFill>
-                      <a:srgbClr val="FFFFFF"/>
-                    </a:solidFill>
-                  </a:tcPr>
-                </a:tc>
-                <a:tc>
-                  <a:txBody>
-                    <a:bodyPr/>
-                    <a:lstStyle/>
-                    <a:p>
-                      <a:pPr algn="ctr"/>
-                      <a:r>
-                        <a:rPr sz="1500" b="0">
-                          <a:solidFill>
-                            <a:srgbClr val="1E293B"/>
-                          </a:solidFill>
-                          <a:latin typeface="微软雅黑"/>
-                        </a:rPr>
-                        <a:t>16升是够用，但够不够爽？双卫同时洗、厨房还开水，16升就差这口稳</a:t>
-                      </a:r>
-                    </a:p>
-                  </a:txBody>
-                  <a:tcPr marL="54864" marR="54864" marT="18288" marB="18288" anchor="ctr">
-                    <a:solidFill>
-                      <a:srgbClr val="FFFFFF"/>
-                    </a:solidFill>
-                  </a:tcPr>
-                </a:tc>
-              </a:tr>
-              <a:tr h="1097280">
-                <a:tc>
-                  <a:txBody>
-                    <a:bodyPr/>
-                    <a:lstStyle/>
-                    <a:p>
-                      <a:pPr algn="l"/>
-                      <a:r>
-                        <a:rPr sz="1500" b="1">
-                          <a:solidFill>
-                            <a:srgbClr val="1E293B"/>
-                          </a:solidFill>
-                          <a:latin typeface="微软雅黑"/>
-                        </a:rPr>
-                        <a:t>16升能增容到18升</a:t>
-                      </a:r>
-                    </a:p>
-                  </a:txBody>
-                  <a:tcPr marL="54864" marR="54864" marT="18288" marB="18288" anchor="ctr">
-                    <a:solidFill>
-                      <a:srgbClr val="F1F5F9"/>
-                    </a:solidFill>
-                  </a:tcPr>
-                </a:tc>
-                <a:tc>
-                  <a:txBody>
-                    <a:bodyPr/>
-                    <a:lstStyle/>
-                    <a:p>
-                      <a:pPr algn="ctr"/>
-                      <a:r>
-                        <a:rPr sz="1500" b="0">
-                          <a:solidFill>
-                            <a:srgbClr val="1E293B"/>
-                          </a:solidFill>
-                          <a:latin typeface="微软雅黑"/>
-                        </a:rPr>
-                        <a:t>增容是把16升的水挤出来卖，加热能力没变；我们是真升级——五分管、火排、喷嘴全换</a:t>
-                      </a:r>
-                    </a:p>
-                  </a:txBody>
-                  <a:tcPr marL="54864" marR="54864" marT="18288" marB="18288" anchor="ctr">
-                    <a:solidFill>
-                      <a:srgbClr val="F1F5F9"/>
-                    </a:solidFill>
-                  </a:tcPr>
-                </a:tc>
-              </a:tr>
-              <a:tr h="1097280">
-                <a:tc>
-                  <a:txBody>
-                    <a:bodyPr/>
-                    <a:lstStyle/>
-                    <a:p>
-                      <a:pPr algn="l"/>
-                      <a:r>
-                        <a:rPr sz="1500" b="1">
-                          <a:solidFill>
-                            <a:srgbClr val="1E293B"/>
-                          </a:solidFill>
-                          <a:latin typeface="微软雅黑"/>
-                        </a:rPr>
-                        <a:t>直接上20升</a:t>
-                      </a:r>
-                    </a:p>
-                  </a:txBody>
-                  <a:tcPr marL="54864" marR="54864" marT="18288" marB="18288" anchor="ctr">
-                    <a:solidFill>
-                      <a:srgbClr val="FFFFFF"/>
-                    </a:solidFill>
-                  </a:tcPr>
-                </a:tc>
-                <a:tc>
-                  <a:txBody>
-                    <a:bodyPr/>
-                    <a:lstStyle/>
-                    <a:p>
-                      <a:pPr algn="ctr"/>
-                      <a:r>
-                        <a:rPr sz="1500" b="0">
-                          <a:solidFill>
-                            <a:srgbClr val="1E293B"/>
-                          </a:solidFill>
-                          <a:latin typeface="微软雅黑"/>
-                        </a:rPr>
-                        <a:t>20升用G2.5表装得上跑不满，实际出水也就16升左右，还得多花换表改管的钱</a:t>
-                      </a:r>
-                    </a:p>
-                  </a:txBody>
-                  <a:tcPr marL="54864" marR="54864" marT="18288" marB="18288" anchor="ctr">
-                    <a:solidFill>
-                      <a:srgbClr val="FFFFFF"/>
-                    </a:solidFill>
-                  </a:tcPr>
-                </a:tc>
-              </a:tr>
-            </a:tbl>
-          </a:graphicData>
-        </a:graphic>
-      </p:graphicFrame>
       <p:sp>
         <p:nvSpPr>
-          <p:cNvPr id="6" name="TextBox 5"/>
+          <p:cNvPr id="5" name="TextBox 4"/>
           <p:cNvSpPr txBox="1"/>
           <p:nvPr/>
         </p:nvSpPr>
         <p:spPr>
           <a:xfrm>
-            <a:off x="548640" y="5120640"/>
-            <a:ext cx="11064240" cy="1188720"/>
+            <a:off x="548640" y="1188720"/>
+            <a:ext cx="11064240" cy="4937760"/>
           </a:xfrm>
           <a:prstGeom prst="rect">
             <a:avLst/>
@@ -4509,17 +4714,177 @@
           <a:p>
             <a:pPr>
               <a:lnSpc>
-                <a:spcPct val="140000"/>
+                <a:spcPct val="145000"/>
               </a:lnSpc>
             </a:pPr>
             <a:r>
-              <a:rPr sz="1500" b="0">
+              <a:rPr sz="1450" b="0">
                 <a:solidFill>
-                  <a:srgbClr val="64748B"/>
+                  <a:srgbClr val="1E293B"/>
                 </a:solidFill>
                 <a:latin typeface="微软雅黑"/>
               </a:rPr>
-              <a:t>统一口径：不纠缠20升改表、不做材质拉踩、不信口承诺保修年限；只讲18升免改表和多点同开。</a:t>
+              <a:t>案例一 · 南山国安居 黄健德（HT750-18）</a:t>
+            </a:r>
+          </a:p>
+          <a:p>
+            <a:pPr>
+              <a:lnSpc>
+                <a:spcPct val="145000"/>
+              </a:lnSpc>
+            </a:pPr>
+            <a:r>
+              <a:rPr sz="1450" b="0">
+                <a:solidFill>
+                  <a:srgbClr val="1E293B"/>
+                </a:solidFill>
+                <a:latin typeface="微软雅黑"/>
+              </a:rPr>
+              <a:t>   客户本来只看烟机。导购多问一句“家里其他电器用了十来年，换过没”，带出燃热；客户原用进口林内16升、三个冲凉房不够用。</a:t>
+            </a:r>
+          </a:p>
+          <a:p>
+            <a:pPr>
+              <a:lnSpc>
+                <a:spcPct val="145000"/>
+              </a:lnSpc>
+            </a:pPr>
+            <a:r>
+              <a:rPr sz="1450" b="0">
+                <a:solidFill>
+                  <a:srgbClr val="1E293B"/>
+                </a:solidFill>
+                <a:latin typeface="微软雅黑"/>
+              </a:rPr>
+              <a:t>   结果：烟机＋18L一起下单。</a:t>
+            </a:r>
+          </a:p>
+          <a:p>
+            <a:pPr>
+              <a:lnSpc>
+                <a:spcPct val="145000"/>
+              </a:lnSpc>
+            </a:pPr>
+            <a:r>
+              <a:rPr sz="1450" b="0">
+                <a:solidFill>
+                  <a:srgbClr val="1E293B"/>
+                </a:solidFill>
+                <a:latin typeface="微软雅黑"/>
+              </a:rPr>
+              <a:t/>
+            </a:r>
+          </a:p>
+          <a:p>
+            <a:pPr>
+              <a:lnSpc>
+                <a:spcPct val="145000"/>
+              </a:lnSpc>
+            </a:pPr>
+            <a:r>
+              <a:rPr sz="1450" b="0">
+                <a:solidFill>
+                  <a:srgbClr val="1E293B"/>
+                </a:solidFill>
+                <a:latin typeface="微软雅黑"/>
+              </a:rPr>
+              <a:t>案例二 · 群星京东 杨碧娜（HT8-i1pro）</a:t>
+            </a:r>
+          </a:p>
+          <a:p>
+            <a:pPr>
+              <a:lnSpc>
+                <a:spcPct val="145000"/>
+              </a:lnSpc>
+            </a:pPr>
+            <a:r>
+              <a:rPr sz="1450" b="0">
+                <a:solidFill>
+                  <a:srgbClr val="1E293B"/>
+                </a:solidFill>
+                <a:latin typeface="微软雅黑"/>
+              </a:rPr>
+              <a:t>   二手房三房两卫，烟灶讲完后顺口问“热水器定了吗”；客户说“天冷同时用水不够”。导购当场切到18L单管零冷水——“原管路直接装、不用预埋”。</a:t>
+            </a:r>
+          </a:p>
+          <a:p>
+            <a:pPr>
+              <a:lnSpc>
+                <a:spcPct val="145000"/>
+              </a:lnSpc>
+            </a:pPr>
+            <a:r>
+              <a:rPr sz="1450" b="0">
+                <a:solidFill>
+                  <a:srgbClr val="1E293B"/>
+                </a:solidFill>
+                <a:latin typeface="微软雅黑"/>
+              </a:rPr>
+              <a:t>   结果：热水器当场加购。</a:t>
+            </a:r>
+          </a:p>
+          <a:p>
+            <a:pPr>
+              <a:lnSpc>
+                <a:spcPct val="145000"/>
+              </a:lnSpc>
+            </a:pPr>
+            <a:r>
+              <a:rPr sz="1450" b="0">
+                <a:solidFill>
+                  <a:srgbClr val="1E293B"/>
+                </a:solidFill>
+                <a:latin typeface="微软雅黑"/>
+              </a:rPr>
+              <a:t/>
+            </a:r>
+          </a:p>
+          <a:p>
+            <a:pPr>
+              <a:lnSpc>
+                <a:spcPct val="145000"/>
+              </a:lnSpc>
+            </a:pPr>
+            <a:r>
+              <a:rPr sz="1450" b="0">
+                <a:solidFill>
+                  <a:srgbClr val="1E293B"/>
+                </a:solidFill>
+                <a:latin typeface="微软雅黑"/>
+              </a:rPr>
+              <a:t>案例三 · 群星京东 黎昌文（H8-i1pro）</a:t>
+            </a:r>
+          </a:p>
+          <a:p>
+            <a:pPr>
+              <a:lnSpc>
+                <a:spcPct val="145000"/>
+              </a:lnSpc>
+            </a:pPr>
+            <a:r>
+              <a:rPr sz="1450" b="0">
+                <a:solidFill>
+                  <a:srgbClr val="1E293B"/>
+                </a:solidFill>
+                <a:latin typeface="微软雅黑"/>
+              </a:rPr>
+              <a:t>   客户刚从方太专卖店看过回来，全程只念一个词——“零冷水”。导购不绕参数，直接对上18L零冷水，再用售后和上门时间锁单。</a:t>
+            </a:r>
+          </a:p>
+          <a:p>
+            <a:pPr>
+              <a:lnSpc>
+                <a:spcPct val="145000"/>
+              </a:lnSpc>
+            </a:pPr>
+            <a:r>
+              <a:rPr sz="1450" b="0">
+                <a:solidFill>
+                  <a:srgbClr val="1E293B"/>
+                </a:solidFill>
+                <a:latin typeface="微软雅黑"/>
+              </a:rPr>
+              <a:t>   结果：回头交全款，一次成交。</a:t>
             </a:r>
           </a:p>
         </p:txBody>
@@ -4615,7 +4980,7 @@
                 </a:solidFill>
                 <a:latin typeface="微软雅黑"/>
               </a:rPr>
-              <a:t>六、怎么推：四件事，今天就能开始</a:t>
+              <a:t>六、为什么现在必须推燃热</a:t>
             </a:r>
           </a:p>
         </p:txBody>
@@ -4628,8 +4993,8 @@
         </p:nvSpPr>
         <p:spPr>
           <a:xfrm>
-            <a:off x="9235440" y="201168"/>
-            <a:ext cx="2560320" cy="457200"/>
+            <a:off x="9144000" y="201168"/>
+            <a:ext cx="2651760" cy="457200"/>
           </a:xfrm>
           <a:prstGeom prst="rect">
             <a:avLst/>
@@ -4650,7 +5015,7 @@
                 </a:solidFill>
                 <a:latin typeface="微软雅黑"/>
               </a:rPr>
-              <a:t>落地动作</a:t>
+              <a:t>品类机会</a:t>
             </a:r>
           </a:p>
         </p:txBody>
@@ -4679,7 +5044,7 @@
           <a:p>
             <a:pPr>
               <a:lnSpc>
-                <a:spcPct val="150000"/>
+                <a:spcPct val="155000"/>
               </a:lnSpc>
             </a:pPr>
             <a:r>
@@ -4689,13 +5054,13 @@
                 </a:solidFill>
                 <a:latin typeface="微软雅黑"/>
               </a:rPr>
-              <a:t>1. 开口率做到100%。</a:t>
+              <a:t>1. 品类机会出现，且只有我们有空档。</a:t>
             </a:r>
           </a:p>
           <a:p>
             <a:pPr>
               <a:lnSpc>
-                <a:spcPct val="150000"/>
+                <a:spcPct val="155000"/>
               </a:lnSpc>
             </a:pPr>
             <a:r>
@@ -4705,13 +5070,13 @@
                 </a:solidFill>
                 <a:latin typeface="微软雅黑"/>
               </a:rPr>
-              <a:t>   每个烟灶客户必须提一句热水器：“烟灶报价我等下给您算，您家几个卫生间？热水器要不要一起看看，有加购活动。”</a:t>
+              <a:t>   竞品主战场集中在16升；20升断层（国产几乎放弃、日系当高端旗舰打）。18升是老板在终端的独家位置。</a:t>
             </a:r>
           </a:p>
           <a:p>
             <a:pPr>
               <a:lnSpc>
-                <a:spcPct val="150000"/>
+                <a:spcPct val="155000"/>
               </a:lnSpc>
             </a:pPr>
             <a:r>
@@ -4727,7 +5092,7 @@
           <a:p>
             <a:pPr>
               <a:lnSpc>
-                <a:spcPct val="150000"/>
+                <a:spcPct val="155000"/>
               </a:lnSpc>
             </a:pPr>
             <a:r>
@@ -4737,13 +5102,13 @@
                 </a:solidFill>
                 <a:latin typeface="微软雅黑"/>
               </a:rPr>
-              <a:t>2. 用算出来的升数立标准。</a:t>
+              <a:t>2. 燃热是烟灶客户最顺的那一件。</a:t>
             </a:r>
           </a:p>
           <a:p>
             <a:pPr>
               <a:lnSpc>
-                <a:spcPct val="150000"/>
+                <a:spcPct val="155000"/>
               </a:lnSpc>
             </a:pPr>
             <a:r>
@@ -4753,13 +5118,13 @@
                 </a:solidFill>
                 <a:latin typeface="微软雅黑"/>
               </a:rPr>
-              <a:t>   “您家两个卫生间，18升正好是G2.5气表能真正跑满的最大升数，不用改表。”</a:t>
+              <a:t>   客户本来就是来配齐厨电，热水器是必买项。你不接，他就去别家配。</a:t>
             </a:r>
           </a:p>
           <a:p>
             <a:pPr>
               <a:lnSpc>
-                <a:spcPct val="150000"/>
+                <a:spcPct val="155000"/>
               </a:lnSpc>
             </a:pPr>
             <a:r>
@@ -4775,7 +5140,7 @@
           <a:p>
             <a:pPr>
               <a:lnSpc>
-                <a:spcPct val="150000"/>
+                <a:spcPct val="155000"/>
               </a:lnSpc>
             </a:pPr>
             <a:r>
@@ -4785,13 +5150,13 @@
                 </a:solidFill>
                 <a:latin typeface="微软雅黑"/>
               </a:rPr>
-              <a:t>3. 让客户眼见为实。</a:t>
+              <a:t>3. 客单价与结构更好。</a:t>
             </a:r>
           </a:p>
           <a:p>
             <a:pPr>
               <a:lnSpc>
-                <a:spcPct val="150000"/>
+                <a:spcPct val="155000"/>
               </a:lnSpc>
             </a:pPr>
             <a:r>
@@ -4801,13 +5166,13 @@
                 </a:solidFill>
                 <a:latin typeface="微软雅黑"/>
               </a:rPr>
-              <a:t>   放三点同开的实测视频（16升掉温、18升不掉）＋16/18/20升对比卡，客户自己就能得出结论。</a:t>
+              <a:t>   18L加购价约4000元/台；同样的上门、安装、售后，多做一台燃热，产出完全不同。</a:t>
             </a:r>
           </a:p>
           <a:p>
             <a:pPr>
               <a:lnSpc>
-                <a:spcPct val="150000"/>
+                <a:spcPct val="155000"/>
               </a:lnSpc>
             </a:pPr>
             <a:r>
@@ -4823,7 +5188,7 @@
           <a:p>
             <a:pPr>
               <a:lnSpc>
-                <a:spcPct val="150000"/>
+                <a:spcPct val="155000"/>
               </a:lnSpc>
             </a:pPr>
             <a:r>
@@ -4833,13 +5198,13 @@
                 </a:solidFill>
                 <a:latin typeface="微软雅黑"/>
               </a:rPr>
-              <a:t>4. 留资跟进不断线。</a:t>
+              <a:t>4. 竞争壁垒可以立起来。</a:t>
             </a:r>
           </a:p>
           <a:p>
             <a:pPr>
               <a:lnSpc>
-                <a:spcPct val="150000"/>
+                <a:spcPct val="155000"/>
               </a:lnSpc>
             </a:pPr>
             <a:r>
@@ -4849,7 +5214,7 @@
                 </a:solidFill>
                 <a:latin typeface="微软雅黑"/>
               </a:rPr>
-              <a:t>   加微信、发实测视频和安装图、3天内至少触达2次；有意向的安排免费上门勘测。</a:t>
+              <a:t>   竞品还在讲16升够用；我们把18升讲成标准（G2.5气表能真正跑满的最大升数）。</a:t>
             </a:r>
           </a:p>
         </p:txBody>
@@ -4945,7 +5310,7 @@
                 </a:solidFill>
                 <a:latin typeface="微软雅黑"/>
               </a:rPr>
-              <a:t>七、项目组给的支持 + 今天的行动</a:t>
+              <a:t>七、18L强在哪：三句话讲透</a:t>
             </a:r>
           </a:p>
         </p:txBody>
@@ -4958,8 +5323,1114 @@
         </p:nvSpPr>
         <p:spPr>
           <a:xfrm>
-            <a:off x="9235440" y="201168"/>
-            <a:ext cx="2560320" cy="457200"/>
+            <a:off x="9144000" y="201168"/>
+            <a:ext cx="2651760" cy="457200"/>
+          </a:xfrm>
+          <a:prstGeom prst="rect">
+            <a:avLst/>
+          </a:prstGeom>
+          <a:noFill/>
+        </p:spPr>
+        <p:txBody>
+          <a:bodyPr wrap="none">
+            <a:spAutoFit/>
+          </a:bodyPr>
+          <a:lstStyle/>
+          <a:p>
+            <a:pPr algn="r"/>
+            <a:r>
+              <a:rPr sz="1200">
+                <a:solidFill>
+                  <a:srgbClr val="FDE68A"/>
+                </a:solidFill>
+                <a:latin typeface="微软雅黑"/>
+              </a:rPr>
+              <a:t>产品力</a:t>
+            </a:r>
+          </a:p>
+        </p:txBody>
+      </p:sp>
+      <p:graphicFrame>
+        <p:nvGraphicFramePr>
+          <p:cNvPr id="5" name="Table 4"/>
+          <p:cNvGraphicFramePr>
+            <a:graphicFrameLocks noGrp="1"/>
+          </p:cNvGraphicFramePr>
+          <p:nvPr/>
+        </p:nvGraphicFramePr>
+        <p:xfrm>
+          <a:off x="548640" y="1280160"/>
+          <a:ext cx="11064240" cy="3657600"/>
+        </p:xfrm>
+        <a:graphic>
+          <a:graphicData uri="http://schemas.openxmlformats.org/drawingml/2006/table">
+            <a:tbl>
+              <a:tblPr firstRow="1" bandRow="1">
+                <a:tableStyleId>{5C22544A-7EE6-4342-B048-85BDC9FD1C3A}</a:tableStyleId>
+              </a:tblPr>
+              <a:tblGrid>
+                <a:gridCol w="2212848"/>
+                <a:gridCol w="8851392"/>
+              </a:tblGrid>
+              <a:tr h="914400">
+                <a:tc>
+                  <a:txBody>
+                    <a:bodyPr/>
+                    <a:lstStyle/>
+                    <a:p>
+                      <a:pPr algn="l"/>
+                      <a:r>
+                        <a:rPr sz="1400" b="1">
+                          <a:solidFill>
+                            <a:srgbClr val="FFFFFF"/>
+                          </a:solidFill>
+                          <a:latin typeface="微软雅黑"/>
+                        </a:rPr>
+                        <a:t>核心点</a:t>
+                      </a:r>
+                    </a:p>
+                  </a:txBody>
+                  <a:tcPr marL="54864" marR="54864" marT="18288" marB="18288" anchor="ctr">
+                    <a:solidFill>
+                      <a:srgbClr val="B91C1C"/>
+                    </a:solidFill>
+                  </a:tcPr>
+                </a:tc>
+                <a:tc>
+                  <a:txBody>
+                    <a:bodyPr/>
+                    <a:lstStyle/>
+                    <a:p>
+                      <a:pPr algn="ctr"/>
+                      <a:r>
+                        <a:rPr sz="1400" b="1">
+                          <a:solidFill>
+                            <a:srgbClr val="FFFFFF"/>
+                          </a:solidFill>
+                          <a:latin typeface="微软雅黑"/>
+                        </a:rPr>
+                        <a:t>讲给客户的话</a:t>
+                      </a:r>
+                    </a:p>
+                  </a:txBody>
+                  <a:tcPr marL="54864" marR="54864" marT="18288" marB="18288" anchor="ctr">
+                    <a:solidFill>
+                      <a:srgbClr val="B91C1C"/>
+                    </a:solidFill>
+                  </a:tcPr>
+                </a:tc>
+              </a:tr>
+              <a:tr h="914400">
+                <a:tc>
+                  <a:txBody>
+                    <a:bodyPr/>
+                    <a:lstStyle/>
+                    <a:p>
+                      <a:pPr algn="l"/>
+                      <a:r>
+                        <a:rPr sz="1500" b="1">
+                          <a:solidFill>
+                            <a:srgbClr val="1E293B"/>
+                          </a:solidFill>
+                          <a:latin typeface="微软雅黑"/>
+                        </a:rPr>
+                        <a:t>真18升</a:t>
+                      </a:r>
+                    </a:p>
+                  </a:txBody>
+                  <a:tcPr marL="54864" marR="54864" marT="18288" marB="18288" anchor="ctr">
+                    <a:solidFill>
+                      <a:srgbClr val="FFFFFF"/>
+                    </a:solidFill>
+                  </a:tcPr>
+                </a:tc>
+                <a:tc>
+                  <a:txBody>
+                    <a:bodyPr/>
+                    <a:lstStyle/>
+                    <a:p>
+                      <a:pPr algn="ctr"/>
+                      <a:r>
+                        <a:rPr sz="1500" b="0">
+                          <a:solidFill>
+                            <a:srgbClr val="1E293B"/>
+                          </a:solidFill>
+                          <a:latin typeface="微软雅黑"/>
+                        </a:rPr>
+                        <a:t>换热器四分管升级为五分管，火排面积、喷嘴直径、热负荷同步升级</a:t>
+                      </a:r>
+                    </a:p>
+                  </a:txBody>
+                  <a:tcPr marL="54864" marR="54864" marT="18288" marB="18288" anchor="ctr">
+                    <a:solidFill>
+                      <a:srgbClr val="FFFFFF"/>
+                    </a:solidFill>
+                  </a:tcPr>
+                </a:tc>
+              </a:tr>
+              <a:tr h="914400">
+                <a:tc>
+                  <a:txBody>
+                    <a:bodyPr/>
+                    <a:lstStyle/>
+                    <a:p>
+                      <a:pPr algn="l"/>
+                      <a:r>
+                        <a:rPr sz="1500" b="1">
+                          <a:solidFill>
+                            <a:srgbClr val="1E293B"/>
+                          </a:solidFill>
+                          <a:latin typeface="微软雅黑"/>
+                        </a:rPr>
+                        <a:t>免改表</a:t>
+                      </a:r>
+                    </a:p>
+                  </a:txBody>
+                  <a:tcPr marL="54864" marR="54864" marT="18288" marB="18288" anchor="ctr">
+                    <a:solidFill>
+                      <a:srgbClr val="F1F5F9"/>
+                    </a:solidFill>
+                  </a:tcPr>
+                </a:tc>
+                <a:tc>
+                  <a:txBody>
+                    <a:bodyPr/>
+                    <a:lstStyle/>
+                    <a:p>
+                      <a:pPr algn="ctr"/>
+                      <a:r>
+                        <a:rPr sz="1500" b="0">
+                          <a:solidFill>
+                            <a:srgbClr val="1E293B"/>
+                          </a:solidFill>
+                          <a:latin typeface="微软雅黑"/>
+                        </a:rPr>
+                        <a:t>用现有G2.5气表直接装，不改表不改管路不报批，省两三千</a:t>
+                      </a:r>
+                    </a:p>
+                  </a:txBody>
+                  <a:tcPr marL="54864" marR="54864" marT="18288" marB="18288" anchor="ctr">
+                    <a:solidFill>
+                      <a:srgbClr val="F1F5F9"/>
+                    </a:solidFill>
+                  </a:tcPr>
+                </a:tc>
+              </a:tr>
+              <a:tr h="914400">
+                <a:tc>
+                  <a:txBody>
+                    <a:bodyPr/>
+                    <a:lstStyle/>
+                    <a:p>
+                      <a:pPr algn="l"/>
+                      <a:r>
+                        <a:rPr sz="1500" b="1">
+                          <a:solidFill>
+                            <a:srgbClr val="1E293B"/>
+                          </a:solidFill>
+                          <a:latin typeface="微软雅黑"/>
+                        </a:rPr>
+                        <a:t>恒温稳</a:t>
+                      </a:r>
+                    </a:p>
+                  </a:txBody>
+                  <a:tcPr marL="54864" marR="54864" marT="18288" marB="18288" anchor="ctr">
+                    <a:solidFill>
+                      <a:srgbClr val="FFFFFF"/>
+                    </a:solidFill>
+                  </a:tcPr>
+                </a:tc>
+                <a:tc>
+                  <a:txBody>
+                    <a:bodyPr/>
+                    <a:lstStyle/>
+                    <a:p>
+                      <a:pPr algn="ctr"/>
+                      <a:r>
+                        <a:rPr sz="1500" b="0">
+                          <a:solidFill>
+                            <a:srgbClr val="1E293B"/>
+                          </a:solidFill>
+                          <a:latin typeface="微软雅黑"/>
+                        </a:rPr>
+                        <a:t>±0.1℃精准控温，双卫加厨房同时用水，水温水量双稳</a:t>
+                      </a:r>
+                    </a:p>
+                  </a:txBody>
+                  <a:tcPr marL="54864" marR="54864" marT="18288" marB="18288" anchor="ctr">
+                    <a:solidFill>
+                      <a:srgbClr val="FFFFFF"/>
+                    </a:solidFill>
+                  </a:tcPr>
+                </a:tc>
+              </a:tr>
+            </a:tbl>
+          </a:graphicData>
+        </a:graphic>
+      </p:graphicFrame>
+      <p:sp>
+        <p:nvSpPr>
+          <p:cNvPr id="6" name="TextBox 5"/>
+          <p:cNvSpPr txBox="1"/>
+          <p:nvPr/>
+        </p:nvSpPr>
+        <p:spPr>
+          <a:xfrm>
+            <a:off x="548640" y="5029200"/>
+            <a:ext cx="11064240" cy="1097280"/>
+          </a:xfrm>
+          <a:prstGeom prst="rect">
+            <a:avLst/>
+          </a:prstGeom>
+          <a:noFill/>
+        </p:spPr>
+        <p:txBody>
+          <a:bodyPr wrap="square" lIns="0" rIns="0" tIns="0" bIns="0">
+            <a:spAutoFit/>
+          </a:bodyPr>
+          <a:lstStyle/>
+          <a:p>
+            <a:pPr>
+              <a:lnSpc>
+                <a:spcPct val="140000"/>
+              </a:lnSpc>
+            </a:pPr>
+            <a:r>
+              <a:rPr sz="1700" b="1">
+                <a:solidFill>
+                  <a:srgbClr val="B91C1C"/>
+                </a:solidFill>
+                <a:latin typeface="微软雅黑"/>
+              </a:rPr>
+              <a:t>一句话：同样三四千的价位，竞品给的是14升、16升，我们给的是真18升。</a:t>
+            </a:r>
+          </a:p>
+        </p:txBody>
+      </p:sp>
+    </p:spTree>
+  </p:cSld>
+  <p:clrMapOvr>
+    <a:masterClrMapping/>
+  </p:clrMapOvr>
+</p:sld>
+</file>
+
+<file path=ppt/slides/slide14.xml><?xml version="1.0" encoding="utf-8"?>
+<p:sld xmlns:a="http://schemas.openxmlformats.org/drawingml/2006/main" xmlns:p="http://schemas.openxmlformats.org/presentationml/2006/main" xmlns:r="http://schemas.openxmlformats.org/officeDocument/2006/relationships">
+  <p:cSld>
+    <p:spTree>
+      <p:nvGrpSpPr>
+        <p:cNvPr id="1" name=""/>
+        <p:cNvGrpSpPr/>
+        <p:nvPr/>
+      </p:nvGrpSpPr>
+      <p:grpSpPr/>
+      <p:sp>
+        <p:nvSpPr>
+          <p:cNvPr id="2" name="Rectangle 1"/>
+          <p:cNvSpPr/>
+          <p:nvPr/>
+        </p:nvSpPr>
+        <p:spPr>
+          <a:xfrm>
+            <a:off x="0" y="0"/>
+            <a:ext cx="12192000" cy="868680"/>
+          </a:xfrm>
+          <a:prstGeom prst="rect">
+            <a:avLst/>
+          </a:prstGeom>
+          <a:solidFill>
+            <a:srgbClr val="B91C1C"/>
+          </a:solidFill>
+          <a:ln>
+            <a:noFill/>
+          </a:ln>
+          <a:effectLst/>
+        </p:spPr>
+        <p:style>
+          <a:lnRef idx="1">
+            <a:schemeClr val="accent1"/>
+          </a:lnRef>
+          <a:fillRef idx="3">
+            <a:schemeClr val="accent1"/>
+          </a:fillRef>
+          <a:effectRef idx="2">
+            <a:schemeClr val="accent1"/>
+          </a:effectRef>
+          <a:fontRef idx="minor">
+            <a:schemeClr val="lt1"/>
+          </a:fontRef>
+        </p:style>
+        <p:txBody>
+          <a:bodyPr rtlCol="0" anchor="ctr"/>
+          <a:lstStyle/>
+          <a:p>
+            <a:pPr algn="ctr"/>
+          </a:p>
+        </p:txBody>
+      </p:sp>
+      <p:sp>
+        <p:nvSpPr>
+          <p:cNvPr id="3" name="TextBox 2"/>
+          <p:cNvSpPr txBox="1"/>
+          <p:nvPr/>
+        </p:nvSpPr>
+        <p:spPr>
+          <a:xfrm>
+            <a:off x="457200" y="164592"/>
+            <a:ext cx="8686800" cy="548640"/>
+          </a:xfrm>
+          <a:prstGeom prst="rect">
+            <a:avLst/>
+          </a:prstGeom>
+          <a:noFill/>
+        </p:spPr>
+        <p:txBody>
+          <a:bodyPr wrap="none" anchor="ctr" lIns="0" tIns="0">
+            <a:spAutoFit/>
+          </a:bodyPr>
+          <a:lstStyle/>
+          <a:p>
+            <a:r>
+              <a:rPr sz="2200" b="1">
+                <a:solidFill>
+                  <a:srgbClr val="FFFFFF"/>
+                </a:solidFill>
+                <a:latin typeface="微软雅黑"/>
+              </a:rPr>
+              <a:t>八、竞品会怎么拦，我们怎么接</a:t>
+            </a:r>
+          </a:p>
+        </p:txBody>
+      </p:sp>
+      <p:sp>
+        <p:nvSpPr>
+          <p:cNvPr id="4" name="TextBox 3"/>
+          <p:cNvSpPr txBox="1"/>
+          <p:nvPr/>
+        </p:nvSpPr>
+        <p:spPr>
+          <a:xfrm>
+            <a:off x="9144000" y="201168"/>
+            <a:ext cx="2651760" cy="457200"/>
+          </a:xfrm>
+          <a:prstGeom prst="rect">
+            <a:avLst/>
+          </a:prstGeom>
+          <a:noFill/>
+        </p:spPr>
+        <p:txBody>
+          <a:bodyPr wrap="none">
+            <a:spAutoFit/>
+          </a:bodyPr>
+          <a:lstStyle/>
+          <a:p>
+            <a:pPr algn="r"/>
+            <a:r>
+              <a:rPr sz="1200">
+                <a:solidFill>
+                  <a:srgbClr val="FDE68A"/>
+                </a:solidFill>
+                <a:latin typeface="微软雅黑"/>
+              </a:rPr>
+              <a:t>三种常见打法</a:t>
+            </a:r>
+          </a:p>
+        </p:txBody>
+      </p:sp>
+      <p:graphicFrame>
+        <p:nvGraphicFramePr>
+          <p:cNvPr id="5" name="Table 4"/>
+          <p:cNvGraphicFramePr>
+            <a:graphicFrameLocks noGrp="1"/>
+          </p:cNvGraphicFramePr>
+          <p:nvPr/>
+        </p:nvGraphicFramePr>
+        <p:xfrm>
+          <a:off x="548640" y="1280160"/>
+          <a:ext cx="11064239" cy="4206240"/>
+        </p:xfrm>
+        <a:graphic>
+          <a:graphicData uri="http://schemas.openxmlformats.org/drawingml/2006/table">
+            <a:tbl>
+              <a:tblPr firstRow="1" bandRow="1">
+                <a:tableStyleId>{5C22544A-7EE6-4342-B048-85BDC9FD1C3A}</a:tableStyleId>
+              </a:tblPr>
+              <a:tblGrid>
+                <a:gridCol w="3319272"/>
+                <a:gridCol w="7744967"/>
+              </a:tblGrid>
+              <a:tr h="1051560">
+                <a:tc>
+                  <a:txBody>
+                    <a:bodyPr/>
+                    <a:lstStyle/>
+                    <a:p>
+                      <a:pPr algn="l"/>
+                      <a:r>
+                        <a:rPr sz="1400" b="1">
+                          <a:solidFill>
+                            <a:srgbClr val="FFFFFF"/>
+                          </a:solidFill>
+                          <a:latin typeface="微软雅黑"/>
+                        </a:rPr>
+                        <a:t>竞品打法</a:t>
+                      </a:r>
+                    </a:p>
+                  </a:txBody>
+                  <a:tcPr marL="54864" marR="54864" marT="18288" marB="18288" anchor="ctr">
+                    <a:solidFill>
+                      <a:srgbClr val="B91C1C"/>
+                    </a:solidFill>
+                  </a:tcPr>
+                </a:tc>
+                <a:tc>
+                  <a:txBody>
+                    <a:bodyPr/>
+                    <a:lstStyle/>
+                    <a:p>
+                      <a:pPr algn="ctr"/>
+                      <a:r>
+                        <a:rPr sz="1400" b="1">
+                          <a:solidFill>
+                            <a:srgbClr val="FFFFFF"/>
+                          </a:solidFill>
+                          <a:latin typeface="微软雅黑"/>
+                        </a:rPr>
+                        <a:t>我们的接法</a:t>
+                      </a:r>
+                    </a:p>
+                  </a:txBody>
+                  <a:tcPr marL="54864" marR="54864" marT="18288" marB="18288" anchor="ctr">
+                    <a:solidFill>
+                      <a:srgbClr val="B91C1C"/>
+                    </a:solidFill>
+                  </a:tcPr>
+                </a:tc>
+              </a:tr>
+              <a:tr h="1051560">
+                <a:tc>
+                  <a:txBody>
+                    <a:bodyPr/>
+                    <a:lstStyle/>
+                    <a:p>
+                      <a:pPr algn="l"/>
+                      <a:r>
+                        <a:rPr sz="1500" b="1">
+                          <a:solidFill>
+                            <a:srgbClr val="1E293B"/>
+                          </a:solidFill>
+                          <a:latin typeface="微软雅黑"/>
+                        </a:rPr>
+                        <a:t>16升够用了</a:t>
+                      </a:r>
+                    </a:p>
+                  </a:txBody>
+                  <a:tcPr marL="54864" marR="54864" marT="18288" marB="18288" anchor="ctr">
+                    <a:solidFill>
+                      <a:srgbClr val="FFFFFF"/>
+                    </a:solidFill>
+                  </a:tcPr>
+                </a:tc>
+                <a:tc>
+                  <a:txBody>
+                    <a:bodyPr/>
+                    <a:lstStyle/>
+                    <a:p>
+                      <a:pPr algn="ctr"/>
+                      <a:r>
+                        <a:rPr sz="1500" b="0">
+                          <a:solidFill>
+                            <a:srgbClr val="1E293B"/>
+                          </a:solidFill>
+                          <a:latin typeface="微软雅黑"/>
+                        </a:rPr>
+                        <a:t>16升是够用，但够不够爽？双卫同时洗、厨房还开水，16升就差这口稳</a:t>
+                      </a:r>
+                    </a:p>
+                  </a:txBody>
+                  <a:tcPr marL="54864" marR="54864" marT="18288" marB="18288" anchor="ctr">
+                    <a:solidFill>
+                      <a:srgbClr val="FFFFFF"/>
+                    </a:solidFill>
+                  </a:tcPr>
+                </a:tc>
+              </a:tr>
+              <a:tr h="1051560">
+                <a:tc>
+                  <a:txBody>
+                    <a:bodyPr/>
+                    <a:lstStyle/>
+                    <a:p>
+                      <a:pPr algn="l"/>
+                      <a:r>
+                        <a:rPr sz="1500" b="1">
+                          <a:solidFill>
+                            <a:srgbClr val="1E293B"/>
+                          </a:solidFill>
+                          <a:latin typeface="微软雅黑"/>
+                        </a:rPr>
+                        <a:t>16升能增容到18升</a:t>
+                      </a:r>
+                    </a:p>
+                  </a:txBody>
+                  <a:tcPr marL="54864" marR="54864" marT="18288" marB="18288" anchor="ctr">
+                    <a:solidFill>
+                      <a:srgbClr val="F1F5F9"/>
+                    </a:solidFill>
+                  </a:tcPr>
+                </a:tc>
+                <a:tc>
+                  <a:txBody>
+                    <a:bodyPr/>
+                    <a:lstStyle/>
+                    <a:p>
+                      <a:pPr algn="ctr"/>
+                      <a:r>
+                        <a:rPr sz="1500" b="0">
+                          <a:solidFill>
+                            <a:srgbClr val="1E293B"/>
+                          </a:solidFill>
+                          <a:latin typeface="微软雅黑"/>
+                        </a:rPr>
+                        <a:t>增容是把16升的水挤出来卖，加热能力没变；我们是真升级</a:t>
+                      </a:r>
+                    </a:p>
+                  </a:txBody>
+                  <a:tcPr marL="54864" marR="54864" marT="18288" marB="18288" anchor="ctr">
+                    <a:solidFill>
+                      <a:srgbClr val="F1F5F9"/>
+                    </a:solidFill>
+                  </a:tcPr>
+                </a:tc>
+              </a:tr>
+              <a:tr h="1051560">
+                <a:tc>
+                  <a:txBody>
+                    <a:bodyPr/>
+                    <a:lstStyle/>
+                    <a:p>
+                      <a:pPr algn="l"/>
+                      <a:r>
+                        <a:rPr sz="1500" b="1">
+                          <a:solidFill>
+                            <a:srgbClr val="1E293B"/>
+                          </a:solidFill>
+                          <a:latin typeface="微软雅黑"/>
+                        </a:rPr>
+                        <a:t>直接上20升</a:t>
+                      </a:r>
+                    </a:p>
+                  </a:txBody>
+                  <a:tcPr marL="54864" marR="54864" marT="18288" marB="18288" anchor="ctr">
+                    <a:solidFill>
+                      <a:srgbClr val="FFFFFF"/>
+                    </a:solidFill>
+                  </a:tcPr>
+                </a:tc>
+                <a:tc>
+                  <a:txBody>
+                    <a:bodyPr/>
+                    <a:lstStyle/>
+                    <a:p>
+                      <a:pPr algn="ctr"/>
+                      <a:r>
+                        <a:rPr sz="1500" b="0">
+                          <a:solidFill>
+                            <a:srgbClr val="1E293B"/>
+                          </a:solidFill>
+                          <a:latin typeface="微软雅黑"/>
+                        </a:rPr>
+                        <a:t>20升用G2.5表装得上跑不满，实际出水也就16升左右，还得多花改表改管的钱</a:t>
+                      </a:r>
+                    </a:p>
+                  </a:txBody>
+                  <a:tcPr marL="54864" marR="54864" marT="18288" marB="18288" anchor="ctr">
+                    <a:solidFill>
+                      <a:srgbClr val="FFFFFF"/>
+                    </a:solidFill>
+                  </a:tcPr>
+                </a:tc>
+              </a:tr>
+            </a:tbl>
+          </a:graphicData>
+        </a:graphic>
+      </p:graphicFrame>
+      <p:sp>
+        <p:nvSpPr>
+          <p:cNvPr id="6" name="TextBox 5"/>
+          <p:cNvSpPr txBox="1"/>
+          <p:nvPr/>
+        </p:nvSpPr>
+        <p:spPr>
+          <a:xfrm>
+            <a:off x="548640" y="5029200"/>
+            <a:ext cx="11064240" cy="1188720"/>
+          </a:xfrm>
+          <a:prstGeom prst="rect">
+            <a:avLst/>
+          </a:prstGeom>
+          <a:noFill/>
+        </p:spPr>
+        <p:txBody>
+          <a:bodyPr wrap="square" lIns="0" rIns="0" tIns="0" bIns="0">
+            <a:spAutoFit/>
+          </a:bodyPr>
+          <a:lstStyle/>
+          <a:p>
+            <a:pPr>
+              <a:lnSpc>
+                <a:spcPct val="140000"/>
+              </a:lnSpc>
+            </a:pPr>
+            <a:r>
+              <a:rPr sz="1500" b="0">
+                <a:solidFill>
+                  <a:srgbClr val="64748B"/>
+                </a:solidFill>
+                <a:latin typeface="微软雅黑"/>
+              </a:rPr>
+              <a:t>统一口径：不纠缠20升改表、不做材质拉踩、不信口承诺保修年限；只讲18升免改表和多点同开。</a:t>
+            </a:r>
+          </a:p>
+        </p:txBody>
+      </p:sp>
+    </p:spTree>
+  </p:cSld>
+  <p:clrMapOvr>
+    <a:masterClrMapping/>
+  </p:clrMapOvr>
+</p:sld>
+</file>
+
+<file path=ppt/slides/slide15.xml><?xml version="1.0" encoding="utf-8"?>
+<p:sld xmlns:a="http://schemas.openxmlformats.org/drawingml/2006/main" xmlns:p="http://schemas.openxmlformats.org/presentationml/2006/main" xmlns:r="http://schemas.openxmlformats.org/officeDocument/2006/relationships">
+  <p:cSld>
+    <p:spTree>
+      <p:nvGrpSpPr>
+        <p:cNvPr id="1" name=""/>
+        <p:cNvGrpSpPr/>
+        <p:nvPr/>
+      </p:nvGrpSpPr>
+      <p:grpSpPr/>
+      <p:sp>
+        <p:nvSpPr>
+          <p:cNvPr id="2" name="Rectangle 1"/>
+          <p:cNvSpPr/>
+          <p:nvPr/>
+        </p:nvSpPr>
+        <p:spPr>
+          <a:xfrm>
+            <a:off x="0" y="0"/>
+            <a:ext cx="12192000" cy="868680"/>
+          </a:xfrm>
+          <a:prstGeom prst="rect">
+            <a:avLst/>
+          </a:prstGeom>
+          <a:solidFill>
+            <a:srgbClr val="B91C1C"/>
+          </a:solidFill>
+          <a:ln>
+            <a:noFill/>
+          </a:ln>
+          <a:effectLst/>
+        </p:spPr>
+        <p:style>
+          <a:lnRef idx="1">
+            <a:schemeClr val="accent1"/>
+          </a:lnRef>
+          <a:fillRef idx="3">
+            <a:schemeClr val="accent1"/>
+          </a:fillRef>
+          <a:effectRef idx="2">
+            <a:schemeClr val="accent1"/>
+          </a:effectRef>
+          <a:fontRef idx="minor">
+            <a:schemeClr val="lt1"/>
+          </a:fontRef>
+        </p:style>
+        <p:txBody>
+          <a:bodyPr rtlCol="0" anchor="ctr"/>
+          <a:lstStyle/>
+          <a:p>
+            <a:pPr algn="ctr"/>
+          </a:p>
+        </p:txBody>
+      </p:sp>
+      <p:sp>
+        <p:nvSpPr>
+          <p:cNvPr id="3" name="TextBox 2"/>
+          <p:cNvSpPr txBox="1"/>
+          <p:nvPr/>
+        </p:nvSpPr>
+        <p:spPr>
+          <a:xfrm>
+            <a:off x="457200" y="164592"/>
+            <a:ext cx="8686800" cy="548640"/>
+          </a:xfrm>
+          <a:prstGeom prst="rect">
+            <a:avLst/>
+          </a:prstGeom>
+          <a:noFill/>
+        </p:spPr>
+        <p:txBody>
+          <a:bodyPr wrap="none" anchor="ctr" lIns="0" tIns="0">
+            <a:spAutoFit/>
+          </a:bodyPr>
+          <a:lstStyle/>
+          <a:p>
+            <a:r>
+              <a:rPr sz="2200" b="1">
+                <a:solidFill>
+                  <a:srgbClr val="FFFFFF"/>
+                </a:solidFill>
+                <a:latin typeface="微软雅黑"/>
+              </a:rPr>
+              <a:t>九、怎么推：四件事，今天就能开始</a:t>
+            </a:r>
+          </a:p>
+        </p:txBody>
+      </p:sp>
+      <p:sp>
+        <p:nvSpPr>
+          <p:cNvPr id="4" name="TextBox 3"/>
+          <p:cNvSpPr txBox="1"/>
+          <p:nvPr/>
+        </p:nvSpPr>
+        <p:spPr>
+          <a:xfrm>
+            <a:off x="9144000" y="201168"/>
+            <a:ext cx="2651760" cy="457200"/>
+          </a:xfrm>
+          <a:prstGeom prst="rect">
+            <a:avLst/>
+          </a:prstGeom>
+          <a:noFill/>
+        </p:spPr>
+        <p:txBody>
+          <a:bodyPr wrap="none">
+            <a:spAutoFit/>
+          </a:bodyPr>
+          <a:lstStyle/>
+          <a:p>
+            <a:pPr algn="r"/>
+            <a:r>
+              <a:rPr sz="1200">
+                <a:solidFill>
+                  <a:srgbClr val="FDE68A"/>
+                </a:solidFill>
+                <a:latin typeface="微软雅黑"/>
+              </a:rPr>
+              <a:t>落地动作</a:t>
+            </a:r>
+          </a:p>
+        </p:txBody>
+      </p:sp>
+      <p:sp>
+        <p:nvSpPr>
+          <p:cNvPr id="5" name="TextBox 4"/>
+          <p:cNvSpPr txBox="1"/>
+          <p:nvPr/>
+        </p:nvSpPr>
+        <p:spPr>
+          <a:xfrm>
+            <a:off x="548640" y="1234440"/>
+            <a:ext cx="11064240" cy="5120640"/>
+          </a:xfrm>
+          <a:prstGeom prst="rect">
+            <a:avLst/>
+          </a:prstGeom>
+          <a:noFill/>
+        </p:spPr>
+        <p:txBody>
+          <a:bodyPr wrap="square" lIns="0" rIns="0" tIns="0" bIns="0">
+            <a:spAutoFit/>
+          </a:bodyPr>
+          <a:lstStyle/>
+          <a:p>
+            <a:pPr>
+              <a:lnSpc>
+                <a:spcPct val="150000"/>
+              </a:lnSpc>
+            </a:pPr>
+            <a:r>
+              <a:rPr sz="1500" b="0">
+                <a:solidFill>
+                  <a:srgbClr val="1E293B"/>
+                </a:solidFill>
+                <a:latin typeface="微软雅黑"/>
+              </a:rPr>
+              <a:t>1. 开口率做到100%。</a:t>
+            </a:r>
+          </a:p>
+          <a:p>
+            <a:pPr>
+              <a:lnSpc>
+                <a:spcPct val="150000"/>
+              </a:lnSpc>
+            </a:pPr>
+            <a:r>
+              <a:rPr sz="1500" b="0">
+                <a:solidFill>
+                  <a:srgbClr val="1E293B"/>
+                </a:solidFill>
+                <a:latin typeface="微软雅黑"/>
+              </a:rPr>
+              <a:t>   每个烟灶客户必须提一句热水器：“烟灶报价我等下给您算，您家几个卫生间？热水器要不要一起看看，有加购活动。”</a:t>
+            </a:r>
+          </a:p>
+          <a:p>
+            <a:pPr>
+              <a:lnSpc>
+                <a:spcPct val="150000"/>
+              </a:lnSpc>
+            </a:pPr>
+            <a:r>
+              <a:rPr sz="1500" b="0">
+                <a:solidFill>
+                  <a:srgbClr val="1E293B"/>
+                </a:solidFill>
+                <a:latin typeface="微软雅黑"/>
+              </a:rPr>
+              <a:t/>
+            </a:r>
+          </a:p>
+          <a:p>
+            <a:pPr>
+              <a:lnSpc>
+                <a:spcPct val="150000"/>
+              </a:lnSpc>
+            </a:pPr>
+            <a:r>
+              <a:rPr sz="1500" b="0">
+                <a:solidFill>
+                  <a:srgbClr val="1E293B"/>
+                </a:solidFill>
+                <a:latin typeface="微软雅黑"/>
+              </a:rPr>
+              <a:t>2. 用算出来的升数立标准。</a:t>
+            </a:r>
+          </a:p>
+          <a:p>
+            <a:pPr>
+              <a:lnSpc>
+                <a:spcPct val="150000"/>
+              </a:lnSpc>
+            </a:pPr>
+            <a:r>
+              <a:rPr sz="1500" b="0">
+                <a:solidFill>
+                  <a:srgbClr val="1E293B"/>
+                </a:solidFill>
+                <a:latin typeface="微软雅黑"/>
+              </a:rPr>
+              <a:t>   “您家两个卫生间，18升正好是G2.5气表能真正跑满的最大升数，不用改表。”</a:t>
+            </a:r>
+          </a:p>
+          <a:p>
+            <a:pPr>
+              <a:lnSpc>
+                <a:spcPct val="150000"/>
+              </a:lnSpc>
+            </a:pPr>
+            <a:r>
+              <a:rPr sz="1500" b="0">
+                <a:solidFill>
+                  <a:srgbClr val="1E293B"/>
+                </a:solidFill>
+                <a:latin typeface="微软雅黑"/>
+              </a:rPr>
+              <a:t/>
+            </a:r>
+          </a:p>
+          <a:p>
+            <a:pPr>
+              <a:lnSpc>
+                <a:spcPct val="150000"/>
+              </a:lnSpc>
+            </a:pPr>
+            <a:r>
+              <a:rPr sz="1500" b="0">
+                <a:solidFill>
+                  <a:srgbClr val="1E293B"/>
+                </a:solidFill>
+                <a:latin typeface="微软雅黑"/>
+              </a:rPr>
+              <a:t>3. 让客户眼见为实。</a:t>
+            </a:r>
+          </a:p>
+          <a:p>
+            <a:pPr>
+              <a:lnSpc>
+                <a:spcPct val="150000"/>
+              </a:lnSpc>
+            </a:pPr>
+            <a:r>
+              <a:rPr sz="1500" b="0">
+                <a:solidFill>
+                  <a:srgbClr val="1E293B"/>
+                </a:solidFill>
+                <a:latin typeface="微软雅黑"/>
+              </a:rPr>
+              <a:t>   三点同开实测视频（16升掉温、18升不掉）＋16/18/20升对比卡。</a:t>
+            </a:r>
+          </a:p>
+          <a:p>
+            <a:pPr>
+              <a:lnSpc>
+                <a:spcPct val="150000"/>
+              </a:lnSpc>
+            </a:pPr>
+            <a:r>
+              <a:rPr sz="1500" b="0">
+                <a:solidFill>
+                  <a:srgbClr val="1E293B"/>
+                </a:solidFill>
+                <a:latin typeface="微软雅黑"/>
+              </a:rPr>
+              <a:t/>
+            </a:r>
+          </a:p>
+          <a:p>
+            <a:pPr>
+              <a:lnSpc>
+                <a:spcPct val="150000"/>
+              </a:lnSpc>
+            </a:pPr>
+            <a:r>
+              <a:rPr sz="1500" b="0">
+                <a:solidFill>
+                  <a:srgbClr val="1E293B"/>
+                </a:solidFill>
+                <a:latin typeface="微软雅黑"/>
+              </a:rPr>
+              <a:t>4. 留资跟进不断线。</a:t>
+            </a:r>
+          </a:p>
+          <a:p>
+            <a:pPr>
+              <a:lnSpc>
+                <a:spcPct val="150000"/>
+              </a:lnSpc>
+            </a:pPr>
+            <a:r>
+              <a:rPr sz="1500" b="0">
+                <a:solidFill>
+                  <a:srgbClr val="1E293B"/>
+                </a:solidFill>
+                <a:latin typeface="微软雅黑"/>
+              </a:rPr>
+              <a:t>   加微信、发实测视频和安装图、3天内至少触达2次；有意向的安排免费上门勘测。</a:t>
+            </a:r>
+          </a:p>
+        </p:txBody>
+      </p:sp>
+    </p:spTree>
+  </p:cSld>
+  <p:clrMapOvr>
+    <a:masterClrMapping/>
+  </p:clrMapOvr>
+</p:sld>
+</file>
+
+<file path=ppt/slides/slide16.xml><?xml version="1.0" encoding="utf-8"?>
+<p:sld xmlns:a="http://schemas.openxmlformats.org/drawingml/2006/main" xmlns:p="http://schemas.openxmlformats.org/presentationml/2006/main" xmlns:r="http://schemas.openxmlformats.org/officeDocument/2006/relationships">
+  <p:cSld>
+    <p:spTree>
+      <p:nvGrpSpPr>
+        <p:cNvPr id="1" name=""/>
+        <p:cNvGrpSpPr/>
+        <p:nvPr/>
+      </p:nvGrpSpPr>
+      <p:grpSpPr/>
+      <p:sp>
+        <p:nvSpPr>
+          <p:cNvPr id="2" name="Rectangle 1"/>
+          <p:cNvSpPr/>
+          <p:nvPr/>
+        </p:nvSpPr>
+        <p:spPr>
+          <a:xfrm>
+            <a:off x="0" y="0"/>
+            <a:ext cx="12192000" cy="868680"/>
+          </a:xfrm>
+          <a:prstGeom prst="rect">
+            <a:avLst/>
+          </a:prstGeom>
+          <a:solidFill>
+            <a:srgbClr val="B91C1C"/>
+          </a:solidFill>
+          <a:ln>
+            <a:noFill/>
+          </a:ln>
+          <a:effectLst/>
+        </p:spPr>
+        <p:style>
+          <a:lnRef idx="1">
+            <a:schemeClr val="accent1"/>
+          </a:lnRef>
+          <a:fillRef idx="3">
+            <a:schemeClr val="accent1"/>
+          </a:fillRef>
+          <a:effectRef idx="2">
+            <a:schemeClr val="accent1"/>
+          </a:effectRef>
+          <a:fontRef idx="minor">
+            <a:schemeClr val="lt1"/>
+          </a:fontRef>
+        </p:style>
+        <p:txBody>
+          <a:bodyPr rtlCol="0" anchor="ctr"/>
+          <a:lstStyle/>
+          <a:p>
+            <a:pPr algn="ctr"/>
+          </a:p>
+        </p:txBody>
+      </p:sp>
+      <p:sp>
+        <p:nvSpPr>
+          <p:cNvPr id="3" name="TextBox 2"/>
+          <p:cNvSpPr txBox="1"/>
+          <p:nvPr/>
+        </p:nvSpPr>
+        <p:spPr>
+          <a:xfrm>
+            <a:off x="457200" y="164592"/>
+            <a:ext cx="8686800" cy="548640"/>
+          </a:xfrm>
+          <a:prstGeom prst="rect">
+            <a:avLst/>
+          </a:prstGeom>
+          <a:noFill/>
+        </p:spPr>
+        <p:txBody>
+          <a:bodyPr wrap="none" anchor="ctr" lIns="0" tIns="0">
+            <a:spAutoFit/>
+          </a:bodyPr>
+          <a:lstStyle/>
+          <a:p>
+            <a:r>
+              <a:rPr sz="2200" b="1">
+                <a:solidFill>
+                  <a:srgbClr val="FFFFFF"/>
+                </a:solidFill>
+                <a:latin typeface="微软雅黑"/>
+              </a:rPr>
+              <a:t>十、项目组给的支持 + 今天的行动</a:t>
+            </a:r>
+          </a:p>
+        </p:txBody>
+      </p:sp>
+      <p:sp>
+        <p:nvSpPr>
+          <p:cNvPr id="4" name="TextBox 3"/>
+          <p:cNvSpPr txBox="1"/>
+          <p:nvPr/>
+        </p:nvSpPr>
+        <p:spPr>
+          <a:xfrm>
+            <a:off x="9144000" y="201168"/>
+            <a:ext cx="2651760" cy="457200"/>
           </a:xfrm>
           <a:prstGeom prst="rect">
             <a:avLst/>
@@ -5462,7 +6933,7 @@
                 </a:solidFill>
                 <a:latin typeface="微软雅黑"/>
               </a:rPr>
-              <a:t>总数据达成</a:t>
+              <a:t>一、数据情况 · 总数据达成</a:t>
             </a:r>
           </a:p>
         </p:txBody>
@@ -5475,8 +6946,8 @@
         </p:nvSpPr>
         <p:spPr>
           <a:xfrm>
-            <a:off x="9235440" y="201168"/>
-            <a:ext cx="2560320" cy="457200"/>
+            <a:off x="9144000" y="201168"/>
+            <a:ext cx="2651760" cy="457200"/>
           </a:xfrm>
           <a:prstGeom prst="rect">
             <a:avLst/>
@@ -6417,8 +7888,8 @@
         </p:nvSpPr>
         <p:spPr>
           <a:xfrm>
-            <a:off x="9235440" y="201168"/>
-            <a:ext cx="2560320" cy="457200"/>
+            <a:off x="9144000" y="201168"/>
+            <a:ext cx="2651760" cy="457200"/>
           </a:xfrm>
           <a:prstGeom prst="rect">
             <a:avLst/>
@@ -7354,8 +8825,8 @@
         </p:nvSpPr>
         <p:spPr>
           <a:xfrm>
-            <a:off x="9235440" y="201168"/>
-            <a:ext cx="2560320" cy="457200"/>
+            <a:off x="9144000" y="201168"/>
+            <a:ext cx="2651760" cy="457200"/>
           </a:xfrm>
           <a:prstGeom prst="rect">
             <a:avLst/>
@@ -8408,8 +9879,8 @@
         </p:nvSpPr>
         <p:spPr>
           <a:xfrm>
-            <a:off x="9235440" y="201168"/>
-            <a:ext cx="2560320" cy="457200"/>
+            <a:off x="9144000" y="201168"/>
+            <a:ext cx="2651760" cy="457200"/>
           </a:xfrm>
           <a:prstGeom prst="rect">
             <a:avLst/>
@@ -9462,8 +10933,8 @@
         </p:nvSpPr>
         <p:spPr>
           <a:xfrm>
-            <a:off x="9235440" y="201168"/>
-            <a:ext cx="2560320" cy="457200"/>
+            <a:off x="9144000" y="201168"/>
+            <a:ext cx="2651760" cy="457200"/>
           </a:xfrm>
           <a:prstGeom prst="rect">
             <a:avLst/>
@@ -10428,7 +11899,7 @@
                 </a:solidFill>
                 <a:latin typeface="微软雅黑"/>
               </a:rPr>
-              <a:t>一、配套率：最确定的增量就在这</a:t>
+              <a:t>二、配套率：最确定的增量就在这</a:t>
             </a:r>
           </a:p>
         </p:txBody>
@@ -10441,8 +11912,8 @@
         </p:nvSpPr>
         <p:spPr>
           <a:xfrm>
-            <a:off x="9235440" y="201168"/>
-            <a:ext cx="2560320" cy="457200"/>
+            <a:off x="9144000" y="201168"/>
+            <a:ext cx="2651760" cy="457200"/>
           </a:xfrm>
           <a:prstGeom prst="rect">
             <a:avLst/>
@@ -11203,8 +12674,8 @@
         </p:nvSpPr>
         <p:spPr>
           <a:xfrm>
-            <a:off x="9235440" y="201168"/>
-            <a:ext cx="2560320" cy="457200"/>
+            <a:off x="9144000" y="201168"/>
+            <a:ext cx="2651760" cy="457200"/>
           </a:xfrm>
           <a:prstGeom prst="rect">
             <a:avLst/>
@@ -11874,7 +13345,7 @@
                 </a:solidFill>
                 <a:latin typeface="微软雅黑"/>
               </a:rPr>
-              <a:t>三、为什么现在必须推燃热</a:t>
+              <a:t>三、门店标杆：燃热真的卖得动</a:t>
             </a:r>
           </a:p>
         </p:txBody>
@@ -11887,8 +13358,8 @@
         </p:nvSpPr>
         <p:spPr>
           <a:xfrm>
-            <a:off x="9235440" y="201168"/>
-            <a:ext cx="2560320" cy="457200"/>
+            <a:off x="9144000" y="201168"/>
+            <a:ext cx="2651760" cy="457200"/>
           </a:xfrm>
           <a:prstGeom prst="rect">
             <a:avLst/>
@@ -11909,21 +13380,613 @@
                 </a:solidFill>
                 <a:latin typeface="微软雅黑"/>
               </a:rPr>
-              <a:t>品类机会</a:t>
+              <a:t>9/3-9/15 累计</a:t>
             </a:r>
           </a:p>
         </p:txBody>
       </p:sp>
+      <p:graphicFrame>
+        <p:nvGraphicFramePr>
+          <p:cNvPr id="5" name="Table 4"/>
+          <p:cNvGraphicFramePr>
+            <a:graphicFrameLocks noGrp="1"/>
+          </p:cNvGraphicFramePr>
+          <p:nvPr/>
+        </p:nvGraphicFramePr>
+        <p:xfrm>
+          <a:off x="548640" y="1234440"/>
+          <a:ext cx="11064239" cy="3950208"/>
+        </p:xfrm>
+        <a:graphic>
+          <a:graphicData uri="http://schemas.openxmlformats.org/drawingml/2006/table">
+            <a:tbl>
+              <a:tblPr firstRow="1" bandRow="1">
+                <a:tableStyleId>{5C22544A-7EE6-4342-B048-85BDC9FD1C3A}</a:tableStyleId>
+              </a:tblPr>
+              <a:tblGrid>
+                <a:gridCol w="2655417"/>
+                <a:gridCol w="1106424"/>
+                <a:gridCol w="1106424"/>
+                <a:gridCol w="6195974"/>
+              </a:tblGrid>
+              <a:tr h="658368">
+                <a:tc>
+                  <a:txBody>
+                    <a:bodyPr/>
+                    <a:lstStyle/>
+                    <a:p>
+                      <a:pPr algn="l"/>
+                      <a:r>
+                        <a:rPr sz="1400" b="1">
+                          <a:solidFill>
+                            <a:srgbClr val="FFFFFF"/>
+                          </a:solidFill>
+                          <a:latin typeface="微软雅黑"/>
+                        </a:rPr>
+                        <a:t>门店</a:t>
+                      </a:r>
+                    </a:p>
+                  </a:txBody>
+                  <a:tcPr marL="54864" marR="54864" marT="18288" marB="18288" anchor="ctr">
+                    <a:solidFill>
+                      <a:srgbClr val="B91C1C"/>
+                    </a:solidFill>
+                  </a:tcPr>
+                </a:tc>
+                <a:tc>
+                  <a:txBody>
+                    <a:bodyPr/>
+                    <a:lstStyle/>
+                    <a:p>
+                      <a:pPr algn="ctr"/>
+                      <a:r>
+                        <a:rPr sz="1400" b="1">
+                          <a:solidFill>
+                            <a:srgbClr val="FFFFFF"/>
+                          </a:solidFill>
+                          <a:latin typeface="微软雅黑"/>
+                        </a:rPr>
+                        <a:t>燃热</a:t>
+                      </a:r>
+                    </a:p>
+                  </a:txBody>
+                  <a:tcPr marL="54864" marR="54864" marT="18288" marB="18288" anchor="ctr">
+                    <a:solidFill>
+                      <a:srgbClr val="B91C1C"/>
+                    </a:solidFill>
+                  </a:tcPr>
+                </a:tc>
+                <a:tc>
+                  <a:txBody>
+                    <a:bodyPr/>
+                    <a:lstStyle/>
+                    <a:p>
+                      <a:pPr algn="ctr"/>
+                      <a:r>
+                        <a:rPr sz="1400" b="1">
+                          <a:solidFill>
+                            <a:srgbClr val="FFFFFF"/>
+                          </a:solidFill>
+                          <a:latin typeface="微软雅黑"/>
+                        </a:rPr>
+                        <a:t>18L</a:t>
+                      </a:r>
+                    </a:p>
+                  </a:txBody>
+                  <a:tcPr marL="54864" marR="54864" marT="18288" marB="18288" anchor="ctr">
+                    <a:solidFill>
+                      <a:srgbClr val="B91C1C"/>
+                    </a:solidFill>
+                  </a:tcPr>
+                </a:tc>
+                <a:tc>
+                  <a:txBody>
+                    <a:bodyPr/>
+                    <a:lstStyle/>
+                    <a:p>
+                      <a:pPr algn="ctr"/>
+                      <a:r>
+                        <a:rPr sz="1400" b="1">
+                          <a:solidFill>
+                            <a:srgbClr val="FFFFFF"/>
+                          </a:solidFill>
+                          <a:latin typeface="微软雅黑"/>
+                        </a:rPr>
+                        <a:t>做法（可复制）</a:t>
+                      </a:r>
+                    </a:p>
+                  </a:txBody>
+                  <a:tcPr marL="54864" marR="54864" marT="18288" marB="18288" anchor="ctr">
+                    <a:solidFill>
+                      <a:srgbClr val="B91C1C"/>
+                    </a:solidFill>
+                  </a:tcPr>
+                </a:tc>
+              </a:tr>
+              <a:tr h="658368">
+                <a:tc>
+                  <a:txBody>
+                    <a:bodyPr/>
+                    <a:lstStyle/>
+                    <a:p>
+                      <a:pPr algn="l"/>
+                      <a:r>
+                        <a:rPr sz="1400" b="1">
+                          <a:solidFill>
+                            <a:srgbClr val="15803D"/>
+                          </a:solidFill>
+                          <a:latin typeface="微软雅黑"/>
+                        </a:rPr>
+                        <a:t>龙华万众城</a:t>
+                      </a:r>
+                    </a:p>
+                  </a:txBody>
+                  <a:tcPr marL="54864" marR="54864" marT="18288" marB="18288" anchor="ctr">
+                    <a:solidFill>
+                      <a:srgbClr val="ECFDF5"/>
+                    </a:solidFill>
+                  </a:tcPr>
+                </a:tc>
+                <a:tc>
+                  <a:txBody>
+                    <a:bodyPr/>
+                    <a:lstStyle/>
+                    <a:p>
+                      <a:pPr algn="ctr"/>
+                      <a:r>
+                        <a:rPr sz="1400" b="1">
+                          <a:solidFill>
+                            <a:srgbClr val="15803D"/>
+                          </a:solidFill>
+                          <a:latin typeface="微软雅黑"/>
+                        </a:rPr>
+                        <a:t>8</a:t>
+                      </a:r>
+                    </a:p>
+                  </a:txBody>
+                  <a:tcPr marL="54864" marR="54864" marT="18288" marB="18288" anchor="ctr">
+                    <a:solidFill>
+                      <a:srgbClr val="ECFDF5"/>
+                    </a:solidFill>
+                  </a:tcPr>
+                </a:tc>
+                <a:tc>
+                  <a:txBody>
+                    <a:bodyPr/>
+                    <a:lstStyle/>
+                    <a:p>
+                      <a:pPr algn="ctr"/>
+                      <a:r>
+                        <a:rPr sz="1400" b="1">
+                          <a:solidFill>
+                            <a:srgbClr val="15803D"/>
+                          </a:solidFill>
+                          <a:latin typeface="微软雅黑"/>
+                        </a:rPr>
+                        <a:t>5</a:t>
+                      </a:r>
+                    </a:p>
+                  </a:txBody>
+                  <a:tcPr marL="54864" marR="54864" marT="18288" marB="18288" anchor="ctr">
+                    <a:solidFill>
+                      <a:srgbClr val="ECFDF5"/>
+                    </a:solidFill>
+                  </a:tcPr>
+                </a:tc>
+                <a:tc>
+                  <a:txBody>
+                    <a:bodyPr/>
+                    <a:lstStyle/>
+                    <a:p>
+                      <a:pPr algn="ctr"/>
+                      <a:r>
+                        <a:rPr sz="1400" b="1">
+                          <a:solidFill>
+                            <a:srgbClr val="15803D"/>
+                          </a:solidFill>
+                          <a:latin typeface="微软雅黑"/>
+                        </a:rPr>
+                        <a:t>双卫客户必提18升，烟灶一成交就带</a:t>
+                      </a:r>
+                    </a:p>
+                  </a:txBody>
+                  <a:tcPr marL="54864" marR="54864" marT="18288" marB="18288" anchor="ctr">
+                    <a:solidFill>
+                      <a:srgbClr val="ECFDF5"/>
+                    </a:solidFill>
+                  </a:tcPr>
+                </a:tc>
+              </a:tr>
+              <a:tr h="658368">
+                <a:tc>
+                  <a:txBody>
+                    <a:bodyPr/>
+                    <a:lstStyle/>
+                    <a:p>
+                      <a:pPr algn="l"/>
+                      <a:r>
+                        <a:rPr sz="1400" b="1">
+                          <a:solidFill>
+                            <a:srgbClr val="15803D"/>
+                          </a:solidFill>
+                          <a:latin typeface="微软雅黑"/>
+                        </a:rPr>
+                        <a:t>欧洲城香江家居</a:t>
+                      </a:r>
+                    </a:p>
+                  </a:txBody>
+                  <a:tcPr marL="54864" marR="54864" marT="18288" marB="18288" anchor="ctr">
+                    <a:solidFill>
+                      <a:srgbClr val="ECFDF5"/>
+                    </a:solidFill>
+                  </a:tcPr>
+                </a:tc>
+                <a:tc>
+                  <a:txBody>
+                    <a:bodyPr/>
+                    <a:lstStyle/>
+                    <a:p>
+                      <a:pPr algn="ctr"/>
+                      <a:r>
+                        <a:rPr sz="1400" b="1">
+                          <a:solidFill>
+                            <a:srgbClr val="15803D"/>
+                          </a:solidFill>
+                          <a:latin typeface="微软雅黑"/>
+                        </a:rPr>
+                        <a:t>8</a:t>
+                      </a:r>
+                    </a:p>
+                  </a:txBody>
+                  <a:tcPr marL="54864" marR="54864" marT="18288" marB="18288" anchor="ctr">
+                    <a:solidFill>
+                      <a:srgbClr val="ECFDF5"/>
+                    </a:solidFill>
+                  </a:tcPr>
+                </a:tc>
+                <a:tc>
+                  <a:txBody>
+                    <a:bodyPr/>
+                    <a:lstStyle/>
+                    <a:p>
+                      <a:pPr algn="ctr"/>
+                      <a:r>
+                        <a:rPr sz="1400" b="1">
+                          <a:solidFill>
+                            <a:srgbClr val="15803D"/>
+                          </a:solidFill>
+                          <a:latin typeface="微软雅黑"/>
+                        </a:rPr>
+                        <a:t>5</a:t>
+                      </a:r>
+                    </a:p>
+                  </a:txBody>
+                  <a:tcPr marL="54864" marR="54864" marT="18288" marB="18288" anchor="ctr">
+                    <a:solidFill>
+                      <a:srgbClr val="ECFDF5"/>
+                    </a:solidFill>
+                  </a:tcPr>
+                </a:tc>
+                <a:tc>
+                  <a:txBody>
+                    <a:bodyPr/>
+                    <a:lstStyle/>
+                    <a:p>
+                      <a:pPr algn="ctr"/>
+                      <a:r>
+                        <a:rPr sz="1400" b="1">
+                          <a:solidFill>
+                            <a:srgbClr val="15803D"/>
+                          </a:solidFill>
+                          <a:latin typeface="微软雅黑"/>
+                        </a:rPr>
+                        <a:t>体验区演示＋对比卡，让客户自己得出结论</a:t>
+                      </a:r>
+                    </a:p>
+                  </a:txBody>
+                  <a:tcPr marL="54864" marR="54864" marT="18288" marB="18288" anchor="ctr">
+                    <a:solidFill>
+                      <a:srgbClr val="ECFDF5"/>
+                    </a:solidFill>
+                  </a:tcPr>
+                </a:tc>
+              </a:tr>
+              <a:tr h="658368">
+                <a:tc>
+                  <a:txBody>
+                    <a:bodyPr/>
+                    <a:lstStyle/>
+                    <a:p>
+                      <a:pPr algn="l"/>
+                      <a:r>
+                        <a:rPr sz="1400" b="1">
+                          <a:solidFill>
+                            <a:srgbClr val="15803D"/>
+                          </a:solidFill>
+                          <a:latin typeface="微软雅黑"/>
+                        </a:rPr>
+                        <a:t>宝安华美居</a:t>
+                      </a:r>
+                    </a:p>
+                  </a:txBody>
+                  <a:tcPr marL="54864" marR="54864" marT="18288" marB="18288" anchor="ctr">
+                    <a:solidFill>
+                      <a:srgbClr val="ECFDF5"/>
+                    </a:solidFill>
+                  </a:tcPr>
+                </a:tc>
+                <a:tc>
+                  <a:txBody>
+                    <a:bodyPr/>
+                    <a:lstStyle/>
+                    <a:p>
+                      <a:pPr algn="ctr"/>
+                      <a:r>
+                        <a:rPr sz="1400" b="1">
+                          <a:solidFill>
+                            <a:srgbClr val="15803D"/>
+                          </a:solidFill>
+                          <a:latin typeface="微软雅黑"/>
+                        </a:rPr>
+                        <a:t>7</a:t>
+                      </a:r>
+                    </a:p>
+                  </a:txBody>
+                  <a:tcPr marL="54864" marR="54864" marT="18288" marB="18288" anchor="ctr">
+                    <a:solidFill>
+                      <a:srgbClr val="ECFDF5"/>
+                    </a:solidFill>
+                  </a:tcPr>
+                </a:tc>
+                <a:tc>
+                  <a:txBody>
+                    <a:bodyPr/>
+                    <a:lstStyle/>
+                    <a:p>
+                      <a:pPr algn="ctr"/>
+                      <a:r>
+                        <a:rPr sz="1400" b="1">
+                          <a:solidFill>
+                            <a:srgbClr val="15803D"/>
+                          </a:solidFill>
+                          <a:latin typeface="微软雅黑"/>
+                        </a:rPr>
+                        <a:t>4</a:t>
+                      </a:r>
+                    </a:p>
+                  </a:txBody>
+                  <a:tcPr marL="54864" marR="54864" marT="18288" marB="18288" anchor="ctr">
+                    <a:solidFill>
+                      <a:srgbClr val="ECFDF5"/>
+                    </a:solidFill>
+                  </a:tcPr>
+                </a:tc>
+                <a:tc>
+                  <a:txBody>
+                    <a:bodyPr/>
+                    <a:lstStyle/>
+                    <a:p>
+                      <a:pPr algn="ctr"/>
+                      <a:r>
+                        <a:rPr sz="1400" b="1">
+                          <a:solidFill>
+                            <a:srgbClr val="15803D"/>
+                          </a:solidFill>
+                          <a:latin typeface="微软雅黑"/>
+                        </a:rPr>
+                        <a:t>老客户回访＋转介绍，案例沉淀</a:t>
+                      </a:r>
+                    </a:p>
+                  </a:txBody>
+                  <a:tcPr marL="54864" marR="54864" marT="18288" marB="18288" anchor="ctr">
+                    <a:solidFill>
+                      <a:srgbClr val="ECFDF5"/>
+                    </a:solidFill>
+                  </a:tcPr>
+                </a:tc>
+              </a:tr>
+              <a:tr h="658368">
+                <a:tc>
+                  <a:txBody>
+                    <a:bodyPr/>
+                    <a:lstStyle/>
+                    <a:p>
+                      <a:pPr algn="l"/>
+                      <a:r>
+                        <a:rPr sz="1400" b="1">
+                          <a:solidFill>
+                            <a:srgbClr val="15803D"/>
+                          </a:solidFill>
+                          <a:latin typeface="微软雅黑"/>
+                        </a:rPr>
+                        <a:t>沙井华美居</a:t>
+                      </a:r>
+                    </a:p>
+                  </a:txBody>
+                  <a:tcPr marL="54864" marR="54864" marT="18288" marB="18288" anchor="ctr">
+                    <a:solidFill>
+                      <a:srgbClr val="ECFDF5"/>
+                    </a:solidFill>
+                  </a:tcPr>
+                </a:tc>
+                <a:tc>
+                  <a:txBody>
+                    <a:bodyPr/>
+                    <a:lstStyle/>
+                    <a:p>
+                      <a:pPr algn="ctr"/>
+                      <a:r>
+                        <a:rPr sz="1400" b="1">
+                          <a:solidFill>
+                            <a:srgbClr val="15803D"/>
+                          </a:solidFill>
+                          <a:latin typeface="微软雅黑"/>
+                        </a:rPr>
+                        <a:t>3</a:t>
+                      </a:r>
+                    </a:p>
+                  </a:txBody>
+                  <a:tcPr marL="54864" marR="54864" marT="18288" marB="18288" anchor="ctr">
+                    <a:solidFill>
+                      <a:srgbClr val="ECFDF5"/>
+                    </a:solidFill>
+                  </a:tcPr>
+                </a:tc>
+                <a:tc>
+                  <a:txBody>
+                    <a:bodyPr/>
+                    <a:lstStyle/>
+                    <a:p>
+                      <a:pPr algn="ctr"/>
+                      <a:r>
+                        <a:rPr sz="1400" b="1">
+                          <a:solidFill>
+                            <a:srgbClr val="15803D"/>
+                          </a:solidFill>
+                          <a:latin typeface="微软雅黑"/>
+                        </a:rPr>
+                        <a:t>3</a:t>
+                      </a:r>
+                    </a:p>
+                  </a:txBody>
+                  <a:tcPr marL="54864" marR="54864" marT="18288" marB="18288" anchor="ctr">
+                    <a:solidFill>
+                      <a:srgbClr val="ECFDF5"/>
+                    </a:solidFill>
+                  </a:tcPr>
+                </a:tc>
+                <a:tc>
+                  <a:txBody>
+                    <a:bodyPr/>
+                    <a:lstStyle/>
+                    <a:p>
+                      <a:pPr algn="ctr"/>
+                      <a:r>
+                        <a:rPr sz="1400" b="1">
+                          <a:solidFill>
+                            <a:srgbClr val="15803D"/>
+                          </a:solidFill>
+                          <a:latin typeface="微软雅黑"/>
+                        </a:rPr>
+                        <a:t>出样即卖，18L占比100%</a:t>
+                      </a:r>
+                    </a:p>
+                  </a:txBody>
+                  <a:tcPr marL="54864" marR="54864" marT="18288" marB="18288" anchor="ctr">
+                    <a:solidFill>
+                      <a:srgbClr val="ECFDF5"/>
+                    </a:solidFill>
+                  </a:tcPr>
+                </a:tc>
+              </a:tr>
+              <a:tr h="658368">
+                <a:tc>
+                  <a:txBody>
+                    <a:bodyPr/>
+                    <a:lstStyle/>
+                    <a:p>
+                      <a:pPr algn="l"/>
+                      <a:r>
+                        <a:rPr sz="1400" b="1">
+                          <a:solidFill>
+                            <a:srgbClr val="15803D"/>
+                          </a:solidFill>
+                          <a:latin typeface="微软雅黑"/>
+                        </a:rPr>
+                        <a:t>南山京东</a:t>
+                      </a:r>
+                    </a:p>
+                  </a:txBody>
+                  <a:tcPr marL="54864" marR="54864" marT="18288" marB="18288" anchor="ctr">
+                    <a:solidFill>
+                      <a:srgbClr val="ECFDF5"/>
+                    </a:solidFill>
+                  </a:tcPr>
+                </a:tc>
+                <a:tc>
+                  <a:txBody>
+                    <a:bodyPr/>
+                    <a:lstStyle/>
+                    <a:p>
+                      <a:pPr algn="ctr"/>
+                      <a:r>
+                        <a:rPr sz="1400" b="1">
+                          <a:solidFill>
+                            <a:srgbClr val="15803D"/>
+                          </a:solidFill>
+                          <a:latin typeface="微软雅黑"/>
+                        </a:rPr>
+                        <a:t>10</a:t>
+                      </a:r>
+                    </a:p>
+                  </a:txBody>
+                  <a:tcPr marL="54864" marR="54864" marT="18288" marB="18288" anchor="ctr">
+                    <a:solidFill>
+                      <a:srgbClr val="ECFDF5"/>
+                    </a:solidFill>
+                  </a:tcPr>
+                </a:tc>
+                <a:tc>
+                  <a:txBody>
+                    <a:bodyPr/>
+                    <a:lstStyle/>
+                    <a:p>
+                      <a:pPr algn="ctr"/>
+                      <a:r>
+                        <a:rPr sz="1400" b="1">
+                          <a:solidFill>
+                            <a:srgbClr val="15803D"/>
+                          </a:solidFill>
+                          <a:latin typeface="微软雅黑"/>
+                        </a:rPr>
+                        <a:t>2</a:t>
+                      </a:r>
+                    </a:p>
+                  </a:txBody>
+                  <a:tcPr marL="54864" marR="54864" marT="18288" marB="18288" anchor="ctr">
+                    <a:solidFill>
+                      <a:srgbClr val="ECFDF5"/>
+                    </a:solidFill>
+                  </a:tcPr>
+                </a:tc>
+                <a:tc>
+                  <a:txBody>
+                    <a:bodyPr/>
+                    <a:lstStyle/>
+                    <a:p>
+                      <a:pPr algn="ctr"/>
+                      <a:r>
+                        <a:rPr sz="1400" b="1">
+                          <a:solidFill>
+                            <a:srgbClr val="15803D"/>
+                          </a:solidFill>
+                          <a:latin typeface="微软雅黑"/>
+                        </a:rPr>
+                        <a:t>燃热基本盘最稳（燃热全城第一）</a:t>
+                      </a:r>
+                    </a:p>
+                  </a:txBody>
+                  <a:tcPr marL="54864" marR="54864" marT="18288" marB="18288" anchor="ctr">
+                    <a:solidFill>
+                      <a:srgbClr val="ECFDF5"/>
+                    </a:solidFill>
+                  </a:tcPr>
+                </a:tc>
+              </a:tr>
+            </a:tbl>
+          </a:graphicData>
+        </a:graphic>
+      </p:graphicFrame>
       <p:sp>
         <p:nvSpPr>
-          <p:cNvPr id="5" name="TextBox 4"/>
+          <p:cNvPr id="6" name="TextBox 5"/>
           <p:cNvSpPr txBox="1"/>
           <p:nvPr/>
         </p:nvSpPr>
         <p:spPr>
           <a:xfrm>
-            <a:off x="548640" y="1234440"/>
-            <a:ext cx="11064240" cy="5120640"/>
+            <a:off x="548640" y="5120640"/>
+            <a:ext cx="11064240" cy="1188720"/>
           </a:xfrm>
           <a:prstGeom prst="rect">
             <a:avLst/>
@@ -11938,177 +14001,33 @@
           <a:p>
             <a:pPr>
               <a:lnSpc>
-                <a:spcPct val="155000"/>
+                <a:spcPct val="140000"/>
               </a:lnSpc>
             </a:pPr>
             <a:r>
-              <a:rPr sz="1500" b="0">
+              <a:rPr sz="1600" b="1">
                 <a:solidFill>
-                  <a:srgbClr val="1E293B"/>
+                  <a:srgbClr val="B91C1C"/>
                 </a:solidFill>
                 <a:latin typeface="微软雅黑"/>
               </a:rPr>
-              <a:t>1. 品类机会出现，且只有我们有空档。</a:t>
+              <a:t>77家门店里，43家已经出了燃热、17家已经出了18L。</a:t>
             </a:r>
           </a:p>
           <a:p>
             <a:pPr>
               <a:lnSpc>
-                <a:spcPct val="155000"/>
+                <a:spcPct val="140000"/>
               </a:lnSpc>
             </a:pPr>
             <a:r>
-              <a:rPr sz="1500" b="0">
+              <a:rPr sz="1600" b="1">
                 <a:solidFill>
-                  <a:srgbClr val="1E293B"/>
+                  <a:srgbClr val="B91C1C"/>
                 </a:solidFill>
                 <a:latin typeface="微软雅黑"/>
               </a:rPr>
-              <a:t>   竞品主战场集中在16升；20升断层（国产几乎放弃、日系当高端旗舰打）。18升是老板在终端的独家位置。</a:t>
-            </a:r>
-          </a:p>
-          <a:p>
-            <a:pPr>
-              <a:lnSpc>
-                <a:spcPct val="155000"/>
-              </a:lnSpc>
-            </a:pPr>
-            <a:r>
-              <a:rPr sz="1500" b="0">
-                <a:solidFill>
-                  <a:srgbClr val="1E293B"/>
-                </a:solidFill>
-                <a:latin typeface="微软雅黑"/>
-              </a:rPr>
-              <a:t/>
-            </a:r>
-          </a:p>
-          <a:p>
-            <a:pPr>
-              <a:lnSpc>
-                <a:spcPct val="155000"/>
-              </a:lnSpc>
-            </a:pPr>
-            <a:r>
-              <a:rPr sz="1500" b="0">
-                <a:solidFill>
-                  <a:srgbClr val="1E293B"/>
-                </a:solidFill>
-                <a:latin typeface="微软雅黑"/>
-              </a:rPr>
-              <a:t>2. 燃热是烟灶客户最顺的那一件。</a:t>
-            </a:r>
-          </a:p>
-          <a:p>
-            <a:pPr>
-              <a:lnSpc>
-                <a:spcPct val="155000"/>
-              </a:lnSpc>
-            </a:pPr>
-            <a:r>
-              <a:rPr sz="1500" b="0">
-                <a:solidFill>
-                  <a:srgbClr val="1E293B"/>
-                </a:solidFill>
-                <a:latin typeface="微软雅黑"/>
-              </a:rPr>
-              <a:t>   客户本来就是来配齐厨电，热水器是必买项。你不接，他就去别家配——空着的每一单都是送给竞品。</a:t>
-            </a:r>
-          </a:p>
-          <a:p>
-            <a:pPr>
-              <a:lnSpc>
-                <a:spcPct val="155000"/>
-              </a:lnSpc>
-            </a:pPr>
-            <a:r>
-              <a:rPr sz="1500" b="0">
-                <a:solidFill>
-                  <a:srgbClr val="1E293B"/>
-                </a:solidFill>
-                <a:latin typeface="微软雅黑"/>
-              </a:rPr>
-              <a:t/>
-            </a:r>
-          </a:p>
-          <a:p>
-            <a:pPr>
-              <a:lnSpc>
-                <a:spcPct val="155000"/>
-              </a:lnSpc>
-            </a:pPr>
-            <a:r>
-              <a:rPr sz="1500" b="0">
-                <a:solidFill>
-                  <a:srgbClr val="1E293B"/>
-                </a:solidFill>
-                <a:latin typeface="微软雅黑"/>
-              </a:rPr>
-              <a:t>3. 客单价与结构更好。</a:t>
-            </a:r>
-          </a:p>
-          <a:p>
-            <a:pPr>
-              <a:lnSpc>
-                <a:spcPct val="155000"/>
-              </a:lnSpc>
-            </a:pPr>
-            <a:r>
-              <a:rPr sz="1500" b="0">
-                <a:solidFill>
-                  <a:srgbClr val="1E293B"/>
-                </a:solidFill>
-                <a:latin typeface="微软雅黑"/>
-              </a:rPr>
-              <a:t>   18L加购价约4000元/台；同样的上门、安装、售后，多做一台燃热，产出完全不同。</a:t>
-            </a:r>
-          </a:p>
-          <a:p>
-            <a:pPr>
-              <a:lnSpc>
-                <a:spcPct val="155000"/>
-              </a:lnSpc>
-            </a:pPr>
-            <a:r>
-              <a:rPr sz="1500" b="0">
-                <a:solidFill>
-                  <a:srgbClr val="1E293B"/>
-                </a:solidFill>
-                <a:latin typeface="微软雅黑"/>
-              </a:rPr>
-              <a:t/>
-            </a:r>
-          </a:p>
-          <a:p>
-            <a:pPr>
-              <a:lnSpc>
-                <a:spcPct val="155000"/>
-              </a:lnSpc>
-            </a:pPr>
-            <a:r>
-              <a:rPr sz="1500" b="0">
-                <a:solidFill>
-                  <a:srgbClr val="1E293B"/>
-                </a:solidFill>
-                <a:latin typeface="微软雅黑"/>
-              </a:rPr>
-              <a:t>4. 竞争壁垒可以立起来。</a:t>
-            </a:r>
-          </a:p>
-          <a:p>
-            <a:pPr>
-              <a:lnSpc>
-                <a:spcPct val="155000"/>
-              </a:lnSpc>
-            </a:pPr>
-            <a:r>
-              <a:rPr sz="1500" b="0">
-                <a:solidFill>
-                  <a:srgbClr val="1E293B"/>
-                </a:solidFill>
-                <a:latin typeface="微软雅黑"/>
-              </a:rPr>
-              <a:t>   竞品还在讲16升够用；我们把18升讲成标准（G2.5气表能真正跑满的最大升数），客户认知一旦建立很难被撬走。</a:t>
+              <a:t>卖得动的门店已经证明：不是难卖，是没开口。别人能做5台，你也可以。</a:t>
             </a:r>
           </a:p>
         </p:txBody>
